--- a/연수자료/영양교사_AI_공문서_프롬프트.pptx
+++ b/연수자료/영양교사_AI_공문서_프롬프트.pptx
@@ -1127,7 +1127,7 @@
             </a:lvl1pPr>
           </a:lstStyle>
           <a:p>
-            <a:pPr algn="l" indent="0" marL="0">
+            <a:pPr eaLnBrk="0" algn="l" indent="0" marL="0">
               <a:buNone/>
             </a:pPr>
             <a:endParaRPr lang="en-US" sz="3000" dirty="0"/>
@@ -1170,7 +1170,7 @@
             </a:lvl1pPr>
           </a:lstStyle>
           <a:p>
-            <a:pPr algn="r"/>
+            <a:pPr eaLnBrk="0" algn="r"/>
             <a:fld id="{F7021451-1387-4CA6-816F-3879F97B5CBC}" type="slidenum">
               <a:rPr b="0" lang="en-US"/>
               <a:t>1003</a:t>
@@ -1243,7 +1243,7 @@
             </a:lvl1pPr>
           </a:lstStyle>
           <a:p>
-            <a:pPr algn="l" indent="0" marL="0">
+            <a:pPr eaLnBrk="0" algn="l" indent="0" marL="0">
               <a:buNone/>
             </a:pPr>
             <a:endParaRPr lang="en-US" sz="3400" dirty="0"/>
@@ -1286,7 +1286,7 @@
             </a:lvl1pPr>
           </a:lstStyle>
           <a:p>
-            <a:pPr algn="r"/>
+            <a:pPr eaLnBrk="0" algn="r"/>
             <a:fld id="{F7021451-1387-4CA6-816F-3879F97B5CBC}" type="slidenum">
               <a:rPr b="0" lang="en-US"/>
               <a:t>1004</a:t>
@@ -1356,7 +1356,7 @@
             </a:lvl1pPr>
           </a:lstStyle>
           <a:p>
-            <a:pPr algn="r"/>
+            <a:pPr eaLnBrk="0" algn="r"/>
             <a:fld id="{F7021451-1387-4CA6-816F-3879F97B5CBC}" type="slidenum">
               <a:rPr b="0" lang="en-US"/>
               <a:t>null</a:t>
@@ -1666,7 +1666,7 @@
           <a:bodyPr wrap="square" lIns="0" tIns="0" rIns="0" bIns="0" rtlCol="0" anchor="ctr"/>
           <a:lstStyle/>
           <a:p>
-            <a:pPr indent="0" marL="0">
+            <a:pPr eaLnBrk="0" indent="0" marL="0">
               <a:buNone/>
             </a:pPr>
             <a:r>
@@ -1702,7 +1702,7 @@
           <a:bodyPr wrap="square" lIns="0" tIns="0" rIns="0" bIns="0" rtlCol="0" anchor="t"/>
           <a:lstStyle/>
           <a:p>
-            <a:pPr indent="0" marL="0">
+            <a:pPr eaLnBrk="0" indent="0" marL="0">
               <a:buNone/>
             </a:pPr>
             <a:r>
@@ -1716,7 +1716,7 @@
             <a:endParaRPr lang="en-US" sz="4800" dirty="0"/>
           </a:p>
           <a:p>
-            <a:pPr indent="0" marL="0">
+            <a:pPr eaLnBrk="0" indent="0" marL="0">
               <a:buNone/>
             </a:pPr>
             <a:r>
@@ -1752,7 +1752,7 @@
           <a:bodyPr wrap="square" lIns="0" tIns="0" rIns="0" bIns="0" rtlCol="0" anchor="ctr"/>
           <a:lstStyle/>
           <a:p>
-            <a:pPr indent="0" marL="0">
+            <a:pPr eaLnBrk="0" indent="0" marL="0">
               <a:buNone/>
             </a:pPr>
             <a:r>
@@ -1810,7 +1810,7 @@
           <a:bodyPr wrap="square" lIns="0" tIns="0" rIns="0" bIns="0" rtlCol="0" anchor="ctr"/>
           <a:lstStyle/>
           <a:p>
-            <a:pPr indent="0" marL="0">
+            <a:pPr eaLnBrk="0" indent="0" marL="0">
               <a:buNone/>
             </a:pPr>
             <a:r>
@@ -1868,7 +1868,7 @@
           <a:bodyPr wrap="square" lIns="0" tIns="0" rIns="0" bIns="0" rtlCol="0" anchor="ctr"/>
           <a:lstStyle/>
           <a:p>
-            <a:pPr indent="0" marL="0">
+            <a:pPr eaLnBrk="0" indent="0" marL="0">
               <a:buNone/>
             </a:pPr>
             <a:r>
@@ -1926,7 +1926,7 @@
           <a:bodyPr wrap="square" lIns="0" tIns="0" rIns="0" bIns="0" rtlCol="0" anchor="ctr"/>
           <a:lstStyle/>
           <a:p>
-            <a:pPr indent="0" marL="0">
+            <a:pPr eaLnBrk="0" indent="0" marL="0">
               <a:buNone/>
             </a:pPr>
             <a:r>
@@ -1940,7 +1940,7 @@
             <a:endParaRPr lang="en-US" sz="1700" dirty="0"/>
           </a:p>
           <a:p>
-            <a:pPr indent="0" marL="0">
+            <a:pPr eaLnBrk="0" indent="0" marL="0">
               <a:buNone/>
             </a:pPr>
             <a:r>
@@ -2045,7 +2045,7 @@
           <a:bodyPr wrap="square" lIns="0" tIns="0" rIns="0" bIns="0" rtlCol="0" anchor="ctr"/>
           <a:lstStyle/>
           <a:p>
-            <a:pPr indent="0" marL="0">
+            <a:pPr eaLnBrk="0" indent="0" marL="0">
               <a:buNone/>
             </a:pPr>
             <a:r>
@@ -2083,7 +2083,7 @@
           <a:bodyPr wrap="square" lIns="0" tIns="0" rIns="0" bIns="0" rtlCol="0" anchor="t"/>
           <a:lstStyle/>
           <a:p>
-            <a:pPr algn="l" indent="0" marL="0">
+            <a:pPr eaLnBrk="0" algn="l" indent="0" marL="0">
               <a:buNone/>
             </a:pPr>
             <a:r>
@@ -2097,7 +2097,7 @@
             <a:endParaRPr lang="en-US" sz="3000" dirty="0"/>
           </a:p>
           <a:p>
-            <a:pPr algn="l" indent="0" marL="0">
+            <a:pPr eaLnBrk="0" algn="l" indent="0" marL="0">
               <a:buNone/>
             </a:pPr>
             <a:r>
@@ -2177,7 +2177,7 @@
           <a:bodyPr wrap="square" lIns="0" tIns="0" rIns="0" bIns="0" rtlCol="0" anchor="ctr"/>
           <a:lstStyle/>
           <a:p>
-            <a:pPr indent="0" marL="0">
+            <a:pPr eaLnBrk="0" indent="0" marL="0">
               <a:buNone/>
             </a:pPr>
             <a:r>
@@ -2242,7 +2242,7 @@
           <a:bodyPr wrap="square" lIns="0" tIns="0" rIns="0" bIns="0" rtlCol="0" anchor="ctr"/>
           <a:lstStyle/>
           <a:p>
-            <a:pPr indent="0" marL="0">
+            <a:pPr eaLnBrk="0" indent="0" marL="0">
               <a:lnSpc>
                 <a:spcPct val="135000"/>
               </a:lnSpc>
@@ -2256,7 +2256,7 @@
               </a:rPr>
               <a:t>너는 초등학교 영양교사야. </a:t>
             </a:r>
-            <a:pPr indent="0" marL="0">
+            <a:pPr eaLnBrk="0" indent="0" marL="0">
               <a:lnSpc>
                 <a:spcPct val="135000"/>
               </a:lnSpc>
@@ -2273,7 +2273,7 @@
               </a:rPr>
               <a:t>2026년 5월</a:t>
             </a:r>
-            <a:pPr indent="0" marL="0">
+            <a:pPr eaLnBrk="0" indent="0" marL="0">
               <a:lnSpc>
                 <a:spcPct val="135000"/>
               </a:lnSpc>
@@ -2287,7 +2287,7 @@
               </a:rPr>
               <a:t> '채소 섭취 늘리기 주간' 운영 계획서 초안을 작성해줘. 포함될 내용은 </a:t>
             </a:r>
-            <a:pPr indent="0" marL="0">
+            <a:pPr eaLnBrk="0" indent="0" marL="0">
               <a:lnSpc>
                 <a:spcPct val="135000"/>
               </a:lnSpc>
@@ -2304,7 +2304,7 @@
               </a:rPr>
               <a:t>운영 목적, 기간, 주요 활동(잔반 줄이기 이벤트, 영양퀴즈), 가정 연계 방안</a:t>
             </a:r>
-            <a:pPr indent="0" marL="0">
+            <a:pPr eaLnBrk="0" indent="0" marL="0">
               <a:lnSpc>
                 <a:spcPct val="135000"/>
               </a:lnSpc>
@@ -2367,7 +2367,7 @@
           <a:bodyPr wrap="square" lIns="0" tIns="0" rIns="0" bIns="0" rtlCol="0" anchor="ctr"/>
           <a:lstStyle/>
           <a:p>
-            <a:pPr indent="0" marL="0">
+            <a:pPr eaLnBrk="0" indent="0" marL="0">
               <a:buNone/>
             </a:pPr>
             <a:r>
@@ -2378,7 +2378,7 @@
               </a:rPr>
               <a:t>주황색 부분</a:t>
             </a:r>
-            <a:pPr indent="0" marL="0">
+            <a:pPr eaLnBrk="0" indent="0" marL="0">
               <a:buNone/>
             </a:pPr>
             <a:r>
@@ -2429,7 +2429,7 @@
             </a:lvl1pPr>
           </a:lstStyle>
           <a:p>
-            <a:pPr algn="r"/>
+            <a:pPr eaLnBrk="0" algn="r"/>
             <a:fld id="{F7021451-1387-4CA6-816F-3879F97B5CBC}" type="slidenum">
               <a:rPr b="0" lang="en-US"/>
               <a:t>2</a:t>
@@ -2484,7 +2484,7 @@
           <a:bodyPr wrap="square" lIns="0" tIns="0" rIns="0" bIns="0" rtlCol="0" anchor="ctr"/>
           <a:lstStyle/>
           <a:p>
-            <a:pPr indent="0" marL="0">
+            <a:pPr eaLnBrk="0" indent="0" marL="0">
               <a:buNone/>
             </a:pPr>
             <a:r>
@@ -2522,7 +2522,7 @@
           <a:bodyPr wrap="square" lIns="0" tIns="0" rIns="0" bIns="0" rtlCol="0" anchor="t"/>
           <a:lstStyle/>
           <a:p>
-            <a:pPr algn="l" indent="0" marL="0">
+            <a:pPr eaLnBrk="0" algn="l" indent="0" marL="0">
               <a:buNone/>
             </a:pPr>
             <a:r>
@@ -2536,7 +2536,7 @@
             <a:endParaRPr lang="en-US" sz="3000" dirty="0"/>
           </a:p>
           <a:p>
-            <a:pPr algn="l" indent="0" marL="0">
+            <a:pPr eaLnBrk="0" algn="l" indent="0" marL="0">
               <a:buNone/>
             </a:pPr>
             <a:r>
@@ -2616,7 +2616,7 @@
           <a:bodyPr wrap="square" lIns="0" tIns="0" rIns="0" bIns="0" rtlCol="0" anchor="ctr"/>
           <a:lstStyle/>
           <a:p>
-            <a:pPr indent="0" marL="0">
+            <a:pPr eaLnBrk="0" indent="0" marL="0">
               <a:buNone/>
             </a:pPr>
             <a:r>
@@ -2681,7 +2681,7 @@
           <a:bodyPr wrap="square" lIns="0" tIns="0" rIns="0" bIns="0" rtlCol="0" anchor="ctr"/>
           <a:lstStyle/>
           <a:p>
-            <a:pPr indent="0" marL="0">
+            <a:pPr eaLnBrk="0" indent="0" marL="0">
               <a:lnSpc>
                 <a:spcPct val="135000"/>
               </a:lnSpc>
@@ -2695,7 +2695,7 @@
               </a:rPr>
               <a:t>학부모에게 발송할 가정통신문을 작성해줘. 주제는 </a:t>
             </a:r>
-            <a:pPr indent="0" marL="0">
+            <a:pPr eaLnBrk="0" indent="0" marL="0">
               <a:lnSpc>
                 <a:spcPct val="135000"/>
               </a:lnSpc>
@@ -2712,7 +2712,7 @@
               </a:rPr>
               <a:t>편식 예방을 위한 영양교육 안내</a:t>
             </a:r>
-            <a:pPr indent="0" marL="0">
+            <a:pPr eaLnBrk="0" indent="0" marL="0">
               <a:lnSpc>
                 <a:spcPct val="135000"/>
               </a:lnSpc>
@@ -2726,7 +2726,7 @@
               </a:rPr>
               <a:t>이고, 톤은 </a:t>
             </a:r>
-            <a:pPr indent="0" marL="0">
+            <a:pPr eaLnBrk="0" indent="0" marL="0">
               <a:lnSpc>
                 <a:spcPct val="135000"/>
               </a:lnSpc>
@@ -2743,7 +2743,7 @@
               </a:rPr>
               <a:t>따뜻하고 친근하면서도 전문성 있는</a:t>
             </a:r>
-            <a:pPr indent="0" marL="0">
+            <a:pPr eaLnBrk="0" indent="0" marL="0">
               <a:lnSpc>
                 <a:spcPct val="135000"/>
               </a:lnSpc>
@@ -2757,7 +2757,7 @@
               </a:rPr>
               <a:t> 느낌으로 해줘. 구성은 </a:t>
             </a:r>
-            <a:pPr indent="0" marL="0">
+            <a:pPr eaLnBrk="0" indent="0" marL="0">
               <a:lnSpc>
                 <a:spcPct val="135000"/>
               </a:lnSpc>
@@ -2774,7 +2774,7 @@
               </a:rPr>
               <a:t>인사말 → 편식의 문제점 → 가정 내 지도 방법 → 마무리 인사</a:t>
             </a:r>
-            <a:pPr indent="0" marL="0">
+            <a:pPr eaLnBrk="0" indent="0" marL="0">
               <a:lnSpc>
                 <a:spcPct val="135000"/>
               </a:lnSpc>
@@ -2837,7 +2837,7 @@
           <a:bodyPr wrap="square" lIns="0" tIns="0" rIns="0" bIns="0" rtlCol="0" anchor="ctr"/>
           <a:lstStyle/>
           <a:p>
-            <a:pPr indent="0" marL="0">
+            <a:pPr eaLnBrk="0" indent="0" marL="0">
               <a:buNone/>
             </a:pPr>
             <a:r>
@@ -2848,7 +2848,7 @@
               </a:rPr>
               <a:t>주황색 부분</a:t>
             </a:r>
-            <a:pPr indent="0" marL="0">
+            <a:pPr eaLnBrk="0" indent="0" marL="0">
               <a:buNone/>
             </a:pPr>
             <a:r>
@@ -2899,7 +2899,7 @@
             </a:lvl1pPr>
           </a:lstStyle>
           <a:p>
-            <a:pPr algn="r"/>
+            <a:pPr eaLnBrk="0" algn="r"/>
             <a:fld id="{F7021451-1387-4CA6-816F-3879F97B5CBC}" type="slidenum">
               <a:rPr b="0" lang="en-US"/>
               <a:t>3</a:t>
@@ -2954,7 +2954,7 @@
           <a:bodyPr wrap="square" lIns="0" tIns="0" rIns="0" bIns="0" rtlCol="0" anchor="ctr"/>
           <a:lstStyle/>
           <a:p>
-            <a:pPr indent="0" marL="0">
+            <a:pPr eaLnBrk="0" indent="0" marL="0">
               <a:buNone/>
             </a:pPr>
             <a:r>
@@ -2992,7 +2992,7 @@
           <a:bodyPr wrap="square" lIns="0" tIns="0" rIns="0" bIns="0" rtlCol="0" anchor="t"/>
           <a:lstStyle/>
           <a:p>
-            <a:pPr algn="l" indent="0" marL="0">
+            <a:pPr eaLnBrk="0" algn="l" indent="0" marL="0">
               <a:buNone/>
             </a:pPr>
             <a:r>
@@ -3006,7 +3006,7 @@
             <a:endParaRPr lang="en-US" sz="3000" dirty="0"/>
           </a:p>
           <a:p>
-            <a:pPr algn="l" indent="0" marL="0">
+            <a:pPr eaLnBrk="0" algn="l" indent="0" marL="0">
               <a:buNone/>
             </a:pPr>
             <a:r>
@@ -3086,7 +3086,7 @@
           <a:bodyPr wrap="square" lIns="0" tIns="0" rIns="0" bIns="0" rtlCol="0" anchor="ctr"/>
           <a:lstStyle/>
           <a:p>
-            <a:pPr indent="0" marL="0">
+            <a:pPr eaLnBrk="0" indent="0" marL="0">
               <a:buNone/>
             </a:pPr>
             <a:r>
@@ -3151,7 +3151,7 @@
           <a:bodyPr wrap="square" lIns="0" tIns="0" rIns="0" bIns="0" rtlCol="0" anchor="ctr"/>
           <a:lstStyle/>
           <a:p>
-            <a:pPr indent="0" marL="0">
+            <a:pPr eaLnBrk="0" indent="0" marL="0">
               <a:lnSpc>
                 <a:spcPct val="135000"/>
               </a:lnSpc>
@@ -3165,7 +3165,7 @@
               </a:rPr>
               <a:t>학교급식소위원회 회의록 초안을 만들어줘. 안건은 </a:t>
             </a:r>
-            <a:pPr indent="0" marL="0">
+            <a:pPr eaLnBrk="0" indent="0" marL="0">
               <a:lnSpc>
                 <a:spcPct val="135000"/>
               </a:lnSpc>
@@ -3182,7 +3182,7 @@
               </a:rPr>
               <a:t>1. 2학기 학교급식 식재료 납품업체 평가 결과 보고, 2. 영양·식생활교육 활성화 방안</a:t>
             </a:r>
-            <a:pPr indent="0" marL="0">
+            <a:pPr eaLnBrk="0" indent="0" marL="0">
               <a:lnSpc>
                 <a:spcPct val="135000"/>
               </a:lnSpc>
@@ -3196,7 +3196,7 @@
               </a:rPr>
               <a:t>이야. 참석자는 </a:t>
             </a:r>
-            <a:pPr indent="0" marL="0">
+            <a:pPr eaLnBrk="0" indent="0" marL="0">
               <a:lnSpc>
                 <a:spcPct val="135000"/>
               </a:lnSpc>
@@ -3213,7 +3213,7 @@
               </a:rPr>
               <a:t>위원장, 영양교사, 학부모위원 3명</a:t>
             </a:r>
-            <a:pPr indent="0" marL="0">
+            <a:pPr eaLnBrk="0" indent="0" marL="0">
               <a:lnSpc>
                 <a:spcPct val="135000"/>
               </a:lnSpc>
@@ -3227,7 +3227,7 @@
               </a:rPr>
               <a:t>이고 결정된 주요 내용은 </a:t>
             </a:r>
-            <a:pPr indent="0" marL="0">
+            <a:pPr eaLnBrk="0" indent="0" marL="0">
               <a:lnSpc>
                 <a:spcPct val="135000"/>
               </a:lnSpc>
@@ -3244,7 +3244,7 @@
               </a:rPr>
               <a:t>원안 동의</a:t>
             </a:r>
-            <a:pPr indent="0" marL="0">
+            <a:pPr eaLnBrk="0" indent="0" marL="0">
               <a:lnSpc>
                 <a:spcPct val="135000"/>
               </a:lnSpc>
@@ -3307,7 +3307,7 @@
           <a:bodyPr wrap="square" lIns="0" tIns="0" rIns="0" bIns="0" rtlCol="0" anchor="ctr"/>
           <a:lstStyle/>
           <a:p>
-            <a:pPr indent="0" marL="0">
+            <a:pPr eaLnBrk="0" indent="0" marL="0">
               <a:buNone/>
             </a:pPr>
             <a:r>
@@ -3318,7 +3318,7 @@
               </a:rPr>
               <a:t>주황색 부분</a:t>
             </a:r>
-            <a:pPr indent="0" marL="0">
+            <a:pPr eaLnBrk="0" indent="0" marL="0">
               <a:buNone/>
             </a:pPr>
             <a:r>
@@ -3369,7 +3369,7 @@
             </a:lvl1pPr>
           </a:lstStyle>
           <a:p>
-            <a:pPr algn="r"/>
+            <a:pPr eaLnBrk="0" algn="r"/>
             <a:fld id="{F7021451-1387-4CA6-816F-3879F97B5CBC}" type="slidenum">
               <a:rPr b="0" lang="en-US"/>
               <a:t>4</a:t>
@@ -3426,7 +3426,7 @@
           <a:bodyPr wrap="square" lIns="0" tIns="0" rIns="0" bIns="0" rtlCol="0" anchor="ctr"/>
           <a:lstStyle/>
           <a:p>
-            <a:pPr algn="l" indent="0" marL="0">
+            <a:pPr eaLnBrk="0" algn="l" indent="0" marL="0">
               <a:buNone/>
             </a:pPr>
             <a:r>
@@ -3535,7 +3535,7 @@
           <a:bodyPr wrap="square" lIns="0" tIns="0" rIns="0" bIns="0" rtlCol="0" anchor="ctr"/>
           <a:lstStyle/>
           <a:p>
-            <a:pPr algn="r" indent="0" marL="0">
+            <a:pPr eaLnBrk="0" algn="r" indent="0" marL="0">
               <a:buNone/>
             </a:pPr>
             <a:r>
@@ -3571,7 +3571,7 @@
           <a:bodyPr wrap="square" lIns="0" tIns="0" rIns="0" bIns="0" rtlCol="0" anchor="t"/>
           <a:lstStyle/>
           <a:p>
-            <a:pPr indent="0" marL="0">
+            <a:pPr eaLnBrk="0" indent="0" marL="0">
               <a:buNone/>
             </a:pPr>
             <a:r>
@@ -3585,7 +3585,7 @@
             <a:endParaRPr lang="en-US" sz="2200" dirty="0"/>
           </a:p>
           <a:p>
-            <a:pPr indent="0" marL="0">
+            <a:pPr eaLnBrk="0" indent="0" marL="0">
               <a:buNone/>
             </a:pPr>
             <a:r>
@@ -3621,7 +3621,7 @@
           <a:bodyPr wrap="square" lIns="0" tIns="0" rIns="0" bIns="0" rtlCol="0" anchor="t"/>
           <a:lstStyle/>
           <a:p>
-            <a:pPr indent="0" marL="0">
+            <a:pPr eaLnBrk="0" indent="0" marL="0">
               <a:lnSpc>
                 <a:spcPct val="120000"/>
               </a:lnSpc>
@@ -3660,7 +3660,7 @@
           <a:bodyPr wrap="square" lIns="0" tIns="0" rIns="0" bIns="0" rtlCol="0" anchor="ctr"/>
           <a:lstStyle/>
           <a:p>
-            <a:pPr indent="0" marL="0">
+            <a:pPr eaLnBrk="0" indent="0" marL="0">
               <a:buNone/>
             </a:pPr>
             <a:r>
@@ -3769,7 +3769,7 @@
           <a:bodyPr wrap="square" lIns="0" tIns="0" rIns="0" bIns="0" rtlCol="0" anchor="ctr"/>
           <a:lstStyle/>
           <a:p>
-            <a:pPr algn="r" indent="0" marL="0">
+            <a:pPr eaLnBrk="0" algn="r" indent="0" marL="0">
               <a:buNone/>
             </a:pPr>
             <a:r>
@@ -3805,7 +3805,7 @@
           <a:bodyPr wrap="square" lIns="0" tIns="0" rIns="0" bIns="0" rtlCol="0" anchor="t"/>
           <a:lstStyle/>
           <a:p>
-            <a:pPr indent="0" marL="0">
+            <a:pPr eaLnBrk="0" indent="0" marL="0">
               <a:buNone/>
             </a:pPr>
             <a:r>
@@ -3819,7 +3819,7 @@
             <a:endParaRPr lang="en-US" sz="2200" dirty="0"/>
           </a:p>
           <a:p>
-            <a:pPr indent="0" marL="0">
+            <a:pPr eaLnBrk="0" indent="0" marL="0">
               <a:buNone/>
             </a:pPr>
             <a:r>
@@ -3855,7 +3855,7 @@
           <a:bodyPr wrap="square" lIns="0" tIns="0" rIns="0" bIns="0" rtlCol="0" anchor="t"/>
           <a:lstStyle/>
           <a:p>
-            <a:pPr indent="0" marL="0">
+            <a:pPr eaLnBrk="0" indent="0" marL="0">
               <a:lnSpc>
                 <a:spcPct val="120000"/>
               </a:lnSpc>
@@ -3967,7 +3967,7 @@
           <a:bodyPr wrap="square" lIns="0" tIns="0" rIns="0" bIns="0" rtlCol="0" anchor="ctr"/>
           <a:lstStyle/>
           <a:p>
-            <a:pPr algn="r" indent="0" marL="0">
+            <a:pPr eaLnBrk="0" algn="r" indent="0" marL="0">
               <a:buNone/>
             </a:pPr>
             <a:r>
@@ -4003,7 +4003,7 @@
           <a:bodyPr wrap="square" lIns="0" tIns="0" rIns="0" bIns="0" rtlCol="0" anchor="t"/>
           <a:lstStyle/>
           <a:p>
-            <a:pPr indent="0" marL="0">
+            <a:pPr eaLnBrk="0" indent="0" marL="0">
               <a:buNone/>
             </a:pPr>
             <a:r>
@@ -4017,7 +4017,7 @@
             <a:endParaRPr lang="en-US" sz="2200" dirty="0"/>
           </a:p>
           <a:p>
-            <a:pPr indent="0" marL="0">
+            <a:pPr eaLnBrk="0" indent="0" marL="0">
               <a:buNone/>
             </a:pPr>
             <a:r>
@@ -4053,7 +4053,7 @@
           <a:bodyPr wrap="square" lIns="0" tIns="0" rIns="0" bIns="0" rtlCol="0" anchor="t"/>
           <a:lstStyle/>
           <a:p>
-            <a:pPr indent="0" marL="0">
+            <a:pPr eaLnBrk="0" indent="0" marL="0">
               <a:lnSpc>
                 <a:spcPct val="120000"/>
               </a:lnSpc>
@@ -4107,7 +4107,7 @@
             </a:lvl1pPr>
           </a:lstStyle>
           <a:p>
-            <a:pPr algn="r"/>
+            <a:pPr eaLnBrk="0" algn="r"/>
             <a:fld id="{F7021451-1387-4CA6-816F-3879F97B5CBC}" type="slidenum">
               <a:rPr b="0" lang="en-US"/>
               <a:t>5</a:t>
@@ -4162,7 +4162,7 @@
           <a:bodyPr wrap="square" lIns="0" tIns="0" rIns="0" bIns="0" rtlCol="0" anchor="ctr"/>
           <a:lstStyle/>
           <a:p>
-            <a:pPr indent="0" marL="0">
+            <a:pPr eaLnBrk="0" indent="0" marL="0">
               <a:buNone/>
             </a:pPr>
             <a:r>
@@ -4198,7 +4198,7 @@
           <a:bodyPr wrap="square" lIns="0" tIns="0" rIns="0" bIns="0" rtlCol="0" anchor="ctr"/>
           <a:lstStyle/>
           <a:p>
-            <a:pPr indent="0" marL="0">
+            <a:pPr eaLnBrk="0" indent="0" marL="0">
               <a:buNone/>
             </a:pPr>
             <a:r>

--- a/연수자료/영양교사_AI_공문서_프롬프트.pptx
+++ b/연수자료/영양교사_AI_공문서_프롬프트.pptx
@@ -683,7 +683,7 @@
           <a:p>
             <a:r>
               <a:rPr lang="en-US" dirty="0"/>
-              <a:t>가정통신문은 주제, 톤, 구성 순서를 정해 주면 바로 쓸 만한 초안이 나옵니다.</a:t>
+              <a:t>주제, 톤, 구성 순서를 정해 주면 바로 쓸 만한 초안이 나옵니다.</a:t>
             </a:r>
             <a:endParaRPr lang="en-US" dirty="0"/>
           </a:p>
@@ -771,7 +771,7 @@
           <a:p>
             <a:r>
               <a:rPr lang="en-US" dirty="0"/>
-              <a:t>회의록은 실제 회의 메모를 함께 붙여 넣으면 더 정확합니다. 메모 없이 시키면 AI가 발언 내용을 지어낼 수 있습니다.</a:t>
+              <a:t>실제 회의 메모를 함께 붙여 넣으면 더 정확합니다. 메모 없이 시키면 AI가 발언 내용을 지어낼 수 있습니다. 안건 1은 보고 안건이라 엄밀히는 "보고 접수"가 맞습니다.</a:t>
             </a:r>
             <a:endParaRPr lang="en-US" dirty="0"/>
           </a:p>
@@ -1021,12 +1021,19 @@
 
 <file path=ppt/slideLayouts/slideLayout2.xml><?xml version="1.0" encoding="utf-8"?>
 <p:sldLayout xmlns:a="http://schemas.openxmlformats.org/drawingml/2006/main" xmlns:r="http://schemas.openxmlformats.org/officeDocument/2006/relationships" xmlns:p="http://schemas.openxmlformats.org/presentationml/2006/main" preserve="1">
-  <p:cSld name="DARK">
+  <p:cSld name="COVER">
     <p:bg>
       <p:bgPr>
-        <a:solidFill>
-          <a:schemeClr val="tx2"/>
-        </a:solidFill>
+        <a:blipFill dpi="0" rotWithShape="1">
+          <a:blip r:embed="rId1">
+            <a:lum/>
+          </a:blip>
+          <a:srcRect/>
+          <a:stretch>
+            <a:fillRect/>
+          </a:stretch>
+        </a:blipFill>
+        <a:effectLst/>
       </p:bgPr>
     </p:bg>
     <p:spTree>
@@ -1053,12 +1060,19 @@
 
 <file path=ppt/slideLayouts/slideLayout3.xml><?xml version="1.0" encoding="utf-8"?>
 <p:sldLayout xmlns:a="http://schemas.openxmlformats.org/drawingml/2006/main" xmlns:r="http://schemas.openxmlformats.org/officeDocument/2006/relationships" xmlns:p="http://schemas.openxmlformats.org/presentationml/2006/main" preserve="1">
-  <p:cSld name="PROMPT">
+  <p:cSld name="CONTENT">
     <p:bg>
       <p:bgPr>
-        <a:solidFill>
-          <a:schemeClr val="bg1"/>
-        </a:solidFill>
+        <a:blipFill dpi="0" rotWithShape="1">
+          <a:blip r:embed="rId1">
+            <a:lum/>
+          </a:blip>
+          <a:srcRect/>
+          <a:stretch>
+            <a:fillRect/>
+          </a:stretch>
+        </a:blipFill>
+        <a:effectLst/>
       </p:bgPr>
     </p:bg>
     <p:spTree>
@@ -1077,36 +1091,16 @@
       </p:grpSpPr>
       <p:sp>
         <p:nvSpPr>
-          <p:cNvPr id="2" name="Shape 0"/>
-          <p:cNvSpPr/>
-          <p:nvPr/>
-        </p:nvSpPr>
-        <p:spPr>
-          <a:xfrm>
-            <a:off x="0" y="0"/>
-            <a:ext cx="4206240" cy="6858000"/>
-          </a:xfrm>
-          <a:prstGeom prst="rect">
-            <a:avLst/>
-          </a:prstGeom>
-          <a:solidFill>
-            <a:schemeClr val="tx2"/>
-          </a:solidFill>
-          <a:ln/>
-        </p:spPr>
-      </p:sp>
-      <p:sp>
-        <p:nvSpPr>
-          <p:cNvPr id="3" name="Text 1"/>
+          <p:cNvPr id="2" name="Text 0"/>
           <p:cNvSpPr/>
           <p:nvPr>
-            <p:ph idx="101" type="title" hasCustomPrompt="1"/>
+            <p:ph idx="100" type="title" hasCustomPrompt="1"/>
           </p:nvPr>
         </p:nvSpPr>
         <p:spPr>
           <a:xfrm>
-            <a:off x="548640" y="2514600"/>
-            <a:ext cx="3291840" cy="1645920"/>
+            <a:off x="914400" y="960120"/>
+            <a:ext cx="10332720" cy="822960"/>
           </a:xfrm>
           <a:prstGeom prst="rect">
             <a:avLst/>
@@ -1119,7 +1113,7 @@
           <a:lstStyle>
             <a:lvl1pPr algn="l" indent="0" marL="0">
               <a:buNone/>
-              <a:defRPr lang="en-US" sz="3000" b="1" dirty="0">
+              <a:defRPr lang="en-US" sz="3400" b="1" dirty="0">
                 <a:solidFill>
                   <a:schemeClr val="bg1"/>
                 </a:solidFill>
@@ -1130,7 +1124,7 @@
             <a:pPr eaLnBrk="0" algn="l" indent="0" marL="0">
               <a:buNone/>
             </a:pPr>
-            <a:endParaRPr lang="en-US" sz="3000" dirty="0"/>
+            <a:endParaRPr lang="en-US" sz="3400" dirty="0"/>
           </a:p>
         </p:txBody>
       </p:sp>
@@ -1146,8 +1140,8 @@
         </p:nvSpPr>
         <p:spPr>
           <a:xfrm>
-            <a:off x="11247120" y="6355080"/>
-            <a:ext cx="457200" cy="274320"/>
+            <a:off x="11155680" y="6355080"/>
+            <a:ext cx="548640" cy="274320"/>
           </a:xfrm>
           <a:prstGeom prst="rect">
             <a:avLst/>
@@ -1164,7 +1158,7 @@
             <a:lvl1pPr>
               <a:defRPr sz="1000">
                 <a:solidFill>
-                  <a:schemeClr val="accent6"/>
+                  <a:schemeClr val="accent4"/>
                 </a:solidFill>
               </a:defRPr>
             </a:lvl1pPr>
@@ -1174,122 +1168,6 @@
             <a:fld id="{F7021451-1387-4CA6-816F-3879F97B5CBC}" type="slidenum">
               <a:rPr b="0" lang="en-US"/>
               <a:t>1003</a:t>
-            </a:fld>
-            <a:endParaRPr lang="en-US"/>
-          </a:p>
-        </p:txBody>
-      </p:sp>
-    </p:spTree>
-  </p:cSld>
-  <p:clrMapOvr>
-    <a:masterClrMapping/>
-  </p:clrMapOvr>
-</p:sldLayout>
-</file>
-
-<file path=ppt/slideLayouts/slideLayout4.xml><?xml version="1.0" encoding="utf-8"?>
-<p:sldLayout xmlns:a="http://schemas.openxmlformats.org/drawingml/2006/main" xmlns:r="http://schemas.openxmlformats.org/officeDocument/2006/relationships" xmlns:p="http://schemas.openxmlformats.org/presentationml/2006/main" preserve="1">
-  <p:cSld name="LIGHT">
-    <p:bg>
-      <p:bgPr>
-        <a:solidFill>
-          <a:schemeClr val="bg2"/>
-        </a:solidFill>
-      </p:bgPr>
-    </p:bg>
-    <p:spTree>
-      <p:nvGrpSpPr>
-        <p:cNvPr id="1" name=""/>
-        <p:cNvGrpSpPr/>
-        <p:nvPr/>
-      </p:nvGrpSpPr>
-      <p:grpSpPr>
-        <a:xfrm>
-          <a:off x="0" y="0"/>
-          <a:ext cx="0" cy="0"/>
-          <a:chOff x="0" y="0"/>
-          <a:chExt cx="0" cy="0"/>
-        </a:xfrm>
-      </p:grpSpPr>
-      <p:sp>
-        <p:nvSpPr>
-          <p:cNvPr id="2" name="Text 0"/>
-          <p:cNvSpPr/>
-          <p:nvPr>
-            <p:ph idx="100" type="title" hasCustomPrompt="1"/>
-          </p:nvPr>
-        </p:nvSpPr>
-        <p:spPr>
-          <a:xfrm>
-            <a:off x="640080" y="502920"/>
-            <a:ext cx="10881360" cy="822960"/>
-          </a:xfrm>
-          <a:prstGeom prst="rect">
-            <a:avLst/>
-          </a:prstGeom>
-          <a:noFill/>
-          <a:ln/>
-        </p:spPr>
-        <p:txBody>
-          <a:bodyPr wrap="square" rtlCol="0"/>
-          <a:lstStyle>
-            <a:lvl1pPr algn="l" indent="0" marL="0">
-              <a:buNone/>
-              <a:defRPr lang="en-US" sz="3400" b="1" dirty="0">
-                <a:solidFill>
-                  <a:schemeClr val="tx2"/>
-                </a:solidFill>
-              </a:defRPr>
-            </a:lvl1pPr>
-          </a:lstStyle>
-          <a:p>
-            <a:pPr eaLnBrk="0" algn="l" indent="0" marL="0">
-              <a:buNone/>
-            </a:pPr>
-            <a:endParaRPr lang="en-US" sz="3400" dirty="0"/>
-          </a:p>
-        </p:txBody>
-      </p:sp>
-      <p:sp>
-        <p:nvSpPr>
-          <p:cNvPr id="25" name="Slide Number Placeholder 0"/>
-          <p:cNvSpPr>
-            <a:spLocks noGrp="1"/>
-          </p:cNvSpPr>
-          <p:nvPr>
-            <p:ph type="sldNum" sz="quarter" idx="4294967295"/>
-          </p:nvPr>
-        </p:nvSpPr>
-        <p:spPr>
-          <a:xfrm>
-            <a:off x="11247120" y="6355080"/>
-            <a:ext cx="457200" cy="274320"/>
-          </a:xfrm>
-          <a:prstGeom prst="rect">
-            <a:avLst/>
-          </a:prstGeom>
-          <a:extLst>
-            <a:ext uri="{C572A759-6A51-4108-AA02-DFA0A04FC94B}">
-              <ma14:wrappingTextBoxFlag xmlns:ma14="http://schemas.microsoft.com/office/mac/drawingml/2011/main" val="0"/>
-            </a:ext>
-          </a:extLst>
-        </p:spPr>
-        <p:txBody>
-          <a:bodyPr/>
-          <a:lstStyle>
-            <a:lvl1pPr>
-              <a:defRPr sz="1000">
-                <a:solidFill>
-                  <a:schemeClr val="accent6"/>
-                </a:solidFill>
-              </a:defRPr>
-            </a:lvl1pPr>
-          </a:lstStyle>
-          <a:p>
-            <a:pPr eaLnBrk="0" algn="r"/>
-            <a:fld id="{F7021451-1387-4CA6-816F-3879F97B5CBC}" type="slidenum">
-              <a:rPr b="0" lang="en-US"/>
-              <a:t>1004</a:t>
             </a:fld>
             <a:endParaRPr lang="en-US"/>
           </a:p>
@@ -1332,8 +1210,8 @@
         </p:nvSpPr>
         <p:spPr>
           <a:xfrm>
-            <a:off x="11247120" y="6355080"/>
-            <a:ext cx="457200" cy="274320"/>
+            <a:off x="11155680" y="6355080"/>
+            <a:ext cx="548640" cy="274320"/>
           </a:xfrm>
           <a:prstGeom prst="rect">
             <a:avLst/>
@@ -1350,7 +1228,7 @@
             <a:lvl1pPr>
               <a:defRPr sz="1000">
                 <a:solidFill>
-                  <a:schemeClr val="accent6"/>
+                  <a:schemeClr val="accent4"/>
                 </a:solidFill>
               </a:defRPr>
             </a:lvl1pPr>
@@ -1372,7 +1250,6 @@
     <p:sldLayoutId id="2147483649" r:id="rId1"/>
     <p:sldLayoutId id="2147483650" r:id="rId2"/>
     <p:sldLayoutId id="2147483651" r:id="rId3"/>
-    <p:sldLayoutId id="2147483652" r:id="rId4"/>
   </p:sldLayoutIdLst>
   <p:hf sldNum="0" hdr="0" ftr="0" dt="0"/>
   <p:txStyles>
@@ -1647,14 +1524,14 @@
       </p:grpSpPr>
       <p:sp>
         <p:nvSpPr>
-          <p:cNvPr id="2" name="cover kicker"/>
+          <p:cNvPr id="2" name="kicker"/>
           <p:cNvSpPr txBox="1"/>
           <p:nvPr/>
         </p:nvSpPr>
         <p:spPr>
           <a:xfrm>
-            <a:off x="731520" y="1463040"/>
-            <a:ext cx="6400800" cy="548640"/>
+            <a:off x="914400" y="685800"/>
+            <a:ext cx="10058400" cy="365760"/>
           </a:xfrm>
           <a:prstGeom prst="rect">
             <a:avLst/>
@@ -1670,14 +1547,14 @@
               <a:buNone/>
             </a:pPr>
             <a:r>
-              <a:rPr lang="en-US" sz="2200" b="1" dirty="0">
-                <a:solidFill>
-                  <a:schemeClr val="accent2"/>
-                </a:solidFill>
-              </a:rPr>
-              <a:t>영양교사</a:t>
-            </a:r>
-            <a:endParaRPr lang="en-US" sz="2200" dirty="0"/>
+              <a:rPr lang="en-US" sz="1500" b="1" spc="400" kern="0" dirty="0">
+                <a:solidFill>
+                  <a:schemeClr val="accent1"/>
+                </a:solidFill>
+              </a:rPr>
+              <a:t>영양교사 AI 연수 · PROMPT</a:t>
+            </a:r>
+            <a:endParaRPr lang="en-US" sz="1500" dirty="0"/>
           </a:p>
         </p:txBody>
       </p:sp>
@@ -1689,8 +1566,8 @@
         </p:nvSpPr>
         <p:spPr>
           <a:xfrm>
-            <a:off x="731520" y="2103120"/>
-            <a:ext cx="6400800" cy="2103120"/>
+            <a:off x="914400" y="2606040"/>
+            <a:ext cx="10332720" cy="1097280"/>
           </a:xfrm>
           <a:prstGeom prst="rect">
             <a:avLst/>
@@ -1699,35 +1576,21 @@
           <a:ln/>
         </p:spPr>
         <p:txBody>
-          <a:bodyPr wrap="square" lIns="0" tIns="0" rIns="0" bIns="0" rtlCol="0" anchor="t"/>
-          <a:lstStyle/>
-          <a:p>
-            <a:pPr eaLnBrk="0" indent="0" marL="0">
-              <a:buNone/>
-            </a:pPr>
-            <a:r>
-              <a:rPr lang="en-US" sz="4800" b="1" dirty="0">
+          <a:bodyPr wrap="square" lIns="0" tIns="0" rIns="0" bIns="0" rtlCol="0" anchor="ctr"/>
+          <a:lstStyle/>
+          <a:p>
+            <a:pPr eaLnBrk="0" indent="0" marL="0">
+              <a:buNone/>
+            </a:pPr>
+            <a:r>
+              <a:rPr lang="en-US" sz="5400" b="1" dirty="0">
                 <a:solidFill>
                   <a:schemeClr val="bg1"/>
                 </a:solidFill>
               </a:rPr>
-              <a:t>AI 공문서 작성</a:t>
-            </a:r>
-            <a:endParaRPr lang="en-US" sz="4800" dirty="0"/>
-          </a:p>
-          <a:p>
-            <a:pPr eaLnBrk="0" indent="0" marL="0">
-              <a:buNone/>
-            </a:pPr>
-            <a:r>
-              <a:rPr lang="en-US" sz="4800" b="1" dirty="0">
-                <a:solidFill>
-                  <a:schemeClr val="bg1"/>
-                </a:solidFill>
-              </a:rPr>
-              <a:t>프롬프트 예시</a:t>
-            </a:r>
-            <a:endParaRPr lang="en-US" sz="4800" dirty="0"/>
+              <a:t>AI로 공문서 초안 만들기</a:t>
+            </a:r>
+            <a:endParaRPr lang="en-US" sz="5400" dirty="0"/>
           </a:p>
         </p:txBody>
       </p:sp>
@@ -1739,8 +1602,8 @@
         </p:nvSpPr>
         <p:spPr>
           <a:xfrm>
-            <a:off x="731520" y="4480560"/>
-            <a:ext cx="6400800" cy="457200"/>
+            <a:off x="914400" y="3749040"/>
+            <a:ext cx="10332720" cy="731520"/>
           </a:xfrm>
           <a:prstGeom prst="rect">
             <a:avLst/>
@@ -1756,249 +1619,17 @@
               <a:buNone/>
             </a:pPr>
             <a:r>
-              <a:rPr lang="en-US" sz="2000" dirty="0">
-                <a:solidFill>
-                  <a:schemeClr val="accent5"/>
-                </a:solidFill>
-              </a:rPr>
-              <a:t>계획서 · 가정통신문 · 회의록</a:t>
-            </a:r>
-            <a:endParaRPr lang="en-US" sz="2000" dirty="0"/>
-          </a:p>
-        </p:txBody>
-      </p:sp>
-      <p:sp>
-        <p:nvSpPr>
-          <p:cNvPr id="5" name="bubble 1"/>
-          <p:cNvSpPr/>
-          <p:nvPr/>
-        </p:nvSpPr>
-        <p:spPr>
-          <a:xfrm>
-            <a:off x="7589520" y="1554480"/>
-            <a:ext cx="3931920" cy="777240"/>
-          </a:xfrm>
-          <a:prstGeom prst="roundRect">
-            <a:avLst>
-              <a:gd name="adj" fmla="val 35294"/>
-            </a:avLst>
-          </a:prstGeom>
-          <a:solidFill>
-            <a:schemeClr val="accent2"/>
-          </a:solidFill>
-          <a:ln/>
-        </p:spPr>
-      </p:sp>
-      <p:sp>
-        <p:nvSpPr>
-          <p:cNvPr id="6" name="bubble 1 text"/>
-          <p:cNvSpPr txBox="1"/>
-          <p:nvPr/>
-        </p:nvSpPr>
-        <p:spPr>
-          <a:xfrm>
-            <a:off x="7863840" y="1554480"/>
-            <a:ext cx="3383280" cy="777240"/>
-          </a:xfrm>
-          <a:prstGeom prst="rect">
-            <a:avLst/>
-          </a:prstGeom>
-          <a:noFill/>
-          <a:ln/>
-        </p:spPr>
-        <p:txBody>
-          <a:bodyPr wrap="square" lIns="0" tIns="0" rIns="0" bIns="0" rtlCol="0" anchor="ctr"/>
-          <a:lstStyle/>
-          <a:p>
-            <a:pPr eaLnBrk="0" indent="0" marL="0">
-              <a:buNone/>
-            </a:pPr>
-            <a:r>
-              <a:rPr lang="en-US" sz="1700" b="1" dirty="0">
-                <a:solidFill>
-                  <a:schemeClr val="bg1"/>
-                </a:solidFill>
-              </a:rPr>
-              <a:t>너는 초등학교 영양교사야.</a:t>
-            </a:r>
-            <a:endParaRPr lang="en-US" sz="1700" dirty="0"/>
-          </a:p>
-        </p:txBody>
-      </p:sp>
-      <p:sp>
-        <p:nvSpPr>
-          <p:cNvPr id="7" name="bubble 2"/>
-          <p:cNvSpPr/>
-          <p:nvPr/>
-        </p:nvSpPr>
-        <p:spPr>
-          <a:xfrm>
-            <a:off x="6949440" y="2560320"/>
-            <a:ext cx="4572000" cy="777240"/>
-          </a:xfrm>
-          <a:prstGeom prst="roundRect">
-            <a:avLst>
-              <a:gd name="adj" fmla="val 35294"/>
-            </a:avLst>
-          </a:prstGeom>
-          <a:solidFill>
-            <a:schemeClr val="accent2"/>
-          </a:solidFill>
-          <a:ln/>
-        </p:spPr>
-      </p:sp>
-      <p:sp>
-        <p:nvSpPr>
-          <p:cNvPr id="8" name="bubble 2 text"/>
-          <p:cNvSpPr txBox="1"/>
-          <p:nvPr/>
-        </p:nvSpPr>
-        <p:spPr>
-          <a:xfrm>
-            <a:off x="7223760" y="2560320"/>
-            <a:ext cx="4023360" cy="777240"/>
-          </a:xfrm>
-          <a:prstGeom prst="rect">
-            <a:avLst/>
-          </a:prstGeom>
-          <a:noFill/>
-          <a:ln/>
-        </p:spPr>
-        <p:txBody>
-          <a:bodyPr wrap="square" lIns="0" tIns="0" rIns="0" bIns="0" rtlCol="0" anchor="ctr"/>
-          <a:lstStyle/>
-          <a:p>
-            <a:pPr eaLnBrk="0" indent="0" marL="0">
-              <a:buNone/>
-            </a:pPr>
-            <a:r>
-              <a:rPr lang="en-US" sz="1700" b="1" dirty="0">
-                <a:solidFill>
-                  <a:schemeClr val="bg1"/>
-                </a:solidFill>
-              </a:rPr>
-              <a:t>가정통신문을 작성해줘.</a:t>
-            </a:r>
-            <a:endParaRPr lang="en-US" sz="1700" dirty="0"/>
-          </a:p>
-        </p:txBody>
-      </p:sp>
-      <p:sp>
-        <p:nvSpPr>
-          <p:cNvPr id="9" name="bubble 3"/>
-          <p:cNvSpPr/>
-          <p:nvPr/>
-        </p:nvSpPr>
-        <p:spPr>
-          <a:xfrm>
-            <a:off x="7315200" y="3749040"/>
-            <a:ext cx="4206240" cy="1188720"/>
-          </a:xfrm>
-          <a:prstGeom prst="roundRect">
-            <a:avLst>
-              <a:gd name="adj" fmla="val 23077"/>
-            </a:avLst>
-          </a:prstGeom>
-          <a:solidFill>
-            <a:schemeClr val="bg1"/>
-          </a:solidFill>
-          <a:ln/>
-        </p:spPr>
-      </p:sp>
-      <p:sp>
-        <p:nvSpPr>
-          <p:cNvPr id="10" name="bubble 3 text"/>
-          <p:cNvSpPr txBox="1"/>
-          <p:nvPr/>
-        </p:nvSpPr>
-        <p:spPr>
-          <a:xfrm>
-            <a:off x="7589520" y="3749040"/>
-            <a:ext cx="3657600" cy="1188720"/>
-          </a:xfrm>
-          <a:prstGeom prst="rect">
-            <a:avLst/>
-          </a:prstGeom>
-          <a:noFill/>
-          <a:ln/>
-        </p:spPr>
-        <p:txBody>
-          <a:bodyPr wrap="square" lIns="0" tIns="0" rIns="0" bIns="0" rtlCol="0" anchor="ctr"/>
-          <a:lstStyle/>
-          <a:p>
-            <a:pPr eaLnBrk="0" indent="0" marL="0">
-              <a:buNone/>
-            </a:pPr>
-            <a:r>
-              <a:rPr lang="en-US" sz="1700" dirty="0">
-                <a:solidFill>
-                  <a:schemeClr val="tx1"/>
-                </a:solidFill>
-              </a:rPr>
-              <a:t>네! 따뜻하고 친근한 톤으로</a:t>
-            </a:r>
-            <a:endParaRPr lang="en-US" sz="1700" dirty="0"/>
-          </a:p>
-          <a:p>
-            <a:pPr eaLnBrk="0" indent="0" marL="0">
-              <a:buNone/>
-            </a:pPr>
-            <a:r>
-              <a:rPr lang="en-US" sz="1700" dirty="0">
-                <a:solidFill>
-                  <a:schemeClr val="tx1"/>
-                </a:solidFill>
-              </a:rPr>
-              <a:t>초안을 작성해 드릴게요.</a:t>
-            </a:r>
-            <a:endParaRPr lang="en-US" sz="1700" dirty="0"/>
-          </a:p>
-        </p:txBody>
-      </p:sp>
-      <p:sp>
-        <p:nvSpPr>
-          <p:cNvPr id="11" name="ai avatar"/>
-          <p:cNvSpPr/>
-          <p:nvPr/>
-        </p:nvSpPr>
-        <p:spPr>
-          <a:xfrm>
-            <a:off x="6766560" y="4069080"/>
-            <a:ext cx="502920" cy="502920"/>
-          </a:xfrm>
-          <a:prstGeom prst="ellipse">
-            <a:avLst/>
-          </a:prstGeom>
-          <a:solidFill>
-            <a:schemeClr val="accent3"/>
-          </a:solidFill>
-          <a:ln/>
-        </p:spPr>
-      </p:sp>
-      <p:pic>
-        <p:nvPicPr>
-          <p:cNvPr id="12" name="ai avatar icon" descr="preencoded.png">    </p:cNvPr>
-          <p:cNvPicPr>
-            <a:picLocks noChangeAspect="1"/>
-          </p:cNvPicPr>
-          <p:nvPr/>
-        </p:nvPicPr>
-        <p:blipFill>
-          <a:blip r:embed="rId1"/>
-          <a:stretch>
-            <a:fillRect/>
-          </a:stretch>
-        </p:blipFill>
-        <p:spPr>
-          <a:xfrm>
-            <a:off x="6885432" y="4187952"/>
-            <a:ext cx="265176" cy="265176"/>
-          </a:xfrm>
-          <a:prstGeom prst="rect">
-            <a:avLst/>
-          </a:prstGeom>
-        </p:spPr>
-      </p:pic>
+              <a:rPr lang="en-US" sz="3000" b="1" dirty="0">
+                <a:solidFill>
+                  <a:schemeClr val="accent3"/>
+                </a:solidFill>
+              </a:rPr>
+              <a:t>계획서·가정통신문·회의록</a:t>
+            </a:r>
+            <a:endParaRPr lang="en-US" sz="3000" dirty="0"/>
+          </a:p>
+        </p:txBody>
+      </p:sp>
     </p:spTree>
   </p:cSld>
   <p:clrMapOvr>
@@ -2026,14 +1657,14 @@
       </p:grpSpPr>
       <p:sp>
         <p:nvSpPr>
-          <p:cNvPr id="2" name="number"/>
+          <p:cNvPr id="2" name="kicker"/>
           <p:cNvSpPr txBox="1"/>
           <p:nvPr/>
         </p:nvSpPr>
         <p:spPr>
           <a:xfrm>
-            <a:off x="548640" y="640080"/>
-            <a:ext cx="3108960" cy="1188720"/>
+            <a:off x="914400" y="594360"/>
+            <a:ext cx="10058400" cy="365760"/>
           </a:xfrm>
           <a:prstGeom prst="rect">
             <a:avLst/>
@@ -2049,29 +1680,29 @@
               <a:buNone/>
             </a:pPr>
             <a:r>
-              <a:rPr lang="en-US" sz="8000" b="1" dirty="0">
-                <a:solidFill>
-                  <a:schemeClr val="accent2"/>
-                </a:solidFill>
-              </a:rPr>
-              <a:t>01</a:t>
-            </a:r>
-            <a:endParaRPr lang="en-US" sz="8000" dirty="0"/>
-          </a:p>
-        </p:txBody>
-      </p:sp>
-      <p:sp>
-        <p:nvSpPr>
-          <p:cNvPr id="3" name="Text 1"/>
+              <a:rPr lang="en-US" sz="1500" b="1" spc="400" kern="0" dirty="0">
+                <a:solidFill>
+                  <a:schemeClr val="accent1"/>
+                </a:solidFill>
+              </a:rPr>
+              <a:t>PROMPT 01 · 계획서</a:t>
+            </a:r>
+            <a:endParaRPr lang="en-US" sz="1500" dirty="0"/>
+          </a:p>
+        </p:txBody>
+      </p:sp>
+      <p:sp>
+        <p:nvSpPr>
+          <p:cNvPr id="3" name="Text 0"/>
           <p:cNvSpPr/>
           <p:nvPr>
-            <p:ph idx="101" type="title" hasCustomPrompt="1"/>
+            <p:ph idx="100" type="title" hasCustomPrompt="1"/>
           </p:nvPr>
         </p:nvSpPr>
         <p:spPr>
           <a:xfrm>
-            <a:off x="548640" y="2514600"/>
-            <a:ext cx="3291840" cy="1645920"/>
+            <a:off x="914400" y="960120"/>
+            <a:ext cx="10332720" cy="822960"/>
           </a:xfrm>
           <a:prstGeom prst="rect">
             <a:avLst/>
@@ -2080,92 +1711,61 @@
           <a:ln/>
         </p:spPr>
         <p:txBody>
-          <a:bodyPr wrap="square" lIns="0" tIns="0" rIns="0" bIns="0" rtlCol="0" anchor="t"/>
+          <a:bodyPr wrap="square" lIns="0" tIns="0" rIns="0" bIns="0" rtlCol="0" anchor="ctr"/>
           <a:lstStyle/>
           <a:p>
             <a:pPr eaLnBrk="0" algn="l" indent="0" marL="0">
               <a:buNone/>
             </a:pPr>
             <a:r>
-              <a:rPr lang="en-US" sz="3000" b="1" dirty="0">
+              <a:rPr lang="en-US" sz="3400" b="1" dirty="0">
                 <a:solidFill>
                   <a:schemeClr val="bg1"/>
                 </a:solidFill>
               </a:rPr>
-              <a:t>식생활·영양교육</a:t>
-            </a:r>
-            <a:endParaRPr lang="en-US" sz="3000" dirty="0"/>
-          </a:p>
-          <a:p>
-            <a:pPr eaLnBrk="0" algn="l" indent="0" marL="0">
-              <a:buNone/>
-            </a:pPr>
-            <a:r>
-              <a:rPr lang="en-US" sz="3000" b="1" dirty="0">
-                <a:solidFill>
-                  <a:schemeClr val="bg1"/>
-                </a:solidFill>
-              </a:rPr>
-              <a:t>계획서 작성</a:t>
-            </a:r>
-            <a:endParaRPr lang="en-US" sz="3000" dirty="0"/>
-          </a:p>
-        </p:txBody>
-      </p:sp>
-      <p:sp>
-        <p:nvSpPr>
-          <p:cNvPr id="4" name="category icon circle"/>
+              <a:t>식생활·영양교육 계획서 작성</a:t>
+            </a:r>
+            <a:endParaRPr lang="en-US" sz="3400" dirty="0"/>
+          </a:p>
+        </p:txBody>
+      </p:sp>
+      <p:sp>
+        <p:nvSpPr>
+          <p:cNvPr id="4" name="prompt card"/>
           <p:cNvSpPr/>
           <p:nvPr/>
         </p:nvSpPr>
         <p:spPr>
           <a:xfrm>
-            <a:off x="548640" y="5029200"/>
-            <a:ext cx="868680" cy="868680"/>
-          </a:xfrm>
-          <a:prstGeom prst="ellipse">
-            <a:avLst/>
+            <a:off x="914400" y="2148840"/>
+            <a:ext cx="10332720" cy="3429000"/>
+          </a:xfrm>
+          <a:prstGeom prst="roundRect">
+            <a:avLst>
+              <a:gd name="adj" fmla="val 4800"/>
+            </a:avLst>
           </a:prstGeom>
           <a:solidFill>
-            <a:schemeClr val="bg1"/>
+            <a:schemeClr val="tx2"/>
           </a:solidFill>
-          <a:ln/>
-        </p:spPr>
-      </p:sp>
-      <p:pic>
-        <p:nvPicPr>
-          <p:cNvPr id="5" name="category icon" descr="preencoded.png">    </p:cNvPr>
-          <p:cNvPicPr>
-            <a:picLocks noChangeAspect="1"/>
-          </p:cNvPicPr>
-          <p:nvPr/>
-        </p:nvPicPr>
-        <p:blipFill>
-          <a:blip r:embed="rId1"/>
-          <a:stretch>
-            <a:fillRect/>
-          </a:stretch>
-        </p:blipFill>
-        <p:spPr>
-          <a:xfrm>
-            <a:off x="749808" y="5230368"/>
-            <a:ext cx="466344" cy="466344"/>
-          </a:xfrm>
-          <a:prstGeom prst="rect">
-            <a:avLst/>
-          </a:prstGeom>
-        </p:spPr>
-      </p:pic>
-      <p:sp>
-        <p:nvSpPr>
-          <p:cNvPr id="6" name="prompt label"/>
+          <a:ln w="12700">
+            <a:solidFill>
+              <a:schemeClr val="accent5"/>
+            </a:solidFill>
+            <a:prstDash val="solid"/>
+          </a:ln>
+        </p:spPr>
+      </p:sp>
+      <p:sp>
+        <p:nvSpPr>
+          <p:cNvPr id="5" name="prompt text"/>
           <p:cNvSpPr txBox="1"/>
           <p:nvPr/>
         </p:nvSpPr>
         <p:spPr>
           <a:xfrm>
-            <a:off x="4846320" y="685800"/>
-            <a:ext cx="3657600" cy="411480"/>
+            <a:off x="1417320" y="2377440"/>
+            <a:ext cx="9326880" cy="2971800"/>
           </a:xfrm>
           <a:prstGeom prst="rect">
             <a:avLst/>
@@ -2178,59 +1778,89 @@
           <a:lstStyle/>
           <a:p>
             <a:pPr eaLnBrk="0" indent="0" marL="0">
-              <a:buNone/>
-            </a:pPr>
-            <a:r>
-              <a:rPr lang="en-US" sz="1600" b="1" dirty="0">
-                <a:solidFill>
-                  <a:schemeClr val="accent3"/>
-                </a:solidFill>
-              </a:rPr>
-              <a:t>프롬프트 예시</a:t>
-            </a:r>
-            <a:endParaRPr lang="en-US" sz="1600" dirty="0"/>
-          </a:p>
-        </p:txBody>
-      </p:sp>
-      <p:sp>
-        <p:nvSpPr>
-          <p:cNvPr id="7" name="prompt bubble"/>
-          <p:cNvSpPr/>
-          <p:nvPr/>
-        </p:nvSpPr>
-        <p:spPr>
-          <a:xfrm>
-            <a:off x="4846320" y="1280160"/>
-            <a:ext cx="6766560" cy="4206240"/>
-          </a:xfrm>
-          <a:prstGeom prst="roundRect">
-            <a:avLst>
-              <a:gd name="adj" fmla="val 7609"/>
-            </a:avLst>
-          </a:prstGeom>
-          <a:solidFill>
-            <a:schemeClr val="bg2"/>
-          </a:solidFill>
-          <a:ln/>
-          <a:effectLst>
-            <a:outerShdw sx="100000" sy="100000" kx="0" ky="0" algn="bl" rotWithShape="0" blurRad="127000" dist="38100" dir="5400000">
-              <a:srgbClr val="17382B">
-                <a:alpha val="12000"/>
-              </a:srgbClr>
-            </a:outerShdw>
-          </a:effectLst>
-        </p:spPr>
-      </p:sp>
-      <p:sp>
-        <p:nvSpPr>
-          <p:cNvPr id="8" name="prompt text"/>
+              <a:lnSpc>
+                <a:spcPct val="145000"/>
+              </a:lnSpc>
+              <a:buNone/>
+            </a:pPr>
+            <a:r>
+              <a:rPr lang="en-US" sz="2300" dirty="0">
+                <a:solidFill>
+                  <a:schemeClr val="bg2"/>
+                </a:solidFill>
+              </a:rPr>
+              <a:t>너는 초등학교 영양교사야. </a:t>
+            </a:r>
+            <a:pPr eaLnBrk="0" indent="0" marL="0">
+              <a:lnSpc>
+                <a:spcPct val="145000"/>
+              </a:lnSpc>
+              <a:buNone/>
+            </a:pPr>
+            <a:r>
+              <a:rPr lang="en-US" sz="2300" b="1" dirty="0">
+                <a:solidFill>
+                  <a:schemeClr val="accent1"/>
+                </a:solidFill>
+              </a:rPr>
+              <a:t>2026년 5월</a:t>
+            </a:r>
+            <a:pPr eaLnBrk="0" indent="0" marL="0">
+              <a:lnSpc>
+                <a:spcPct val="145000"/>
+              </a:lnSpc>
+              <a:buNone/>
+            </a:pPr>
+            <a:r>
+              <a:rPr lang="en-US" sz="2300" dirty="0">
+                <a:solidFill>
+                  <a:schemeClr val="bg2"/>
+                </a:solidFill>
+              </a:rPr>
+              <a:t> '채소 섭취 늘리기 주간' 운영 계획서 초안을 작성해줘. 포함될 내용은 </a:t>
+            </a:r>
+            <a:pPr eaLnBrk="0" indent="0" marL="0">
+              <a:lnSpc>
+                <a:spcPct val="145000"/>
+              </a:lnSpc>
+              <a:buNone/>
+            </a:pPr>
+            <a:r>
+              <a:rPr lang="en-US" sz="2300" b="1" dirty="0">
+                <a:solidFill>
+                  <a:schemeClr val="accent1"/>
+                </a:solidFill>
+              </a:rPr>
+              <a:t>운영 목적, 기간, 주요 활동(잔반 줄이기 이벤트, 영양퀴즈), 가정 연계 방안</a:t>
+            </a:r>
+            <a:pPr eaLnBrk="0" indent="0" marL="0">
+              <a:lnSpc>
+                <a:spcPct val="145000"/>
+              </a:lnSpc>
+              <a:buNone/>
+            </a:pPr>
+            <a:r>
+              <a:rPr lang="en-US" sz="2300" dirty="0">
+                <a:solidFill>
+                  <a:schemeClr val="bg2"/>
+                </a:solidFill>
+              </a:rPr>
+              <a:t>이야. 공문서 스타일의 격식 있는 문체로 작성해줘.</a:t>
+            </a:r>
+            <a:endParaRPr lang="en-US" sz="2300" dirty="0"/>
+          </a:p>
+        </p:txBody>
+      </p:sp>
+      <p:sp>
+        <p:nvSpPr>
+          <p:cNvPr id="6" name="hint"/>
           <p:cNvSpPr txBox="1"/>
           <p:nvPr/>
         </p:nvSpPr>
         <p:spPr>
           <a:xfrm>
-            <a:off x="5257800" y="1600200"/>
-            <a:ext cx="5943600" cy="3566160"/>
+            <a:off x="914400" y="5806440"/>
+            <a:ext cx="9144000" cy="365760"/>
           </a:xfrm>
           <a:prstGeom prst="rect">
             <a:avLst/>
@@ -2243,140 +1873,15 @@
           <a:lstStyle/>
           <a:p>
             <a:pPr eaLnBrk="0" indent="0" marL="0">
-              <a:lnSpc>
-                <a:spcPct val="135000"/>
-              </a:lnSpc>
-              <a:buNone/>
-            </a:pPr>
-            <a:r>
-              <a:rPr lang="en-US" sz="2200" dirty="0">
-                <a:solidFill>
-                  <a:schemeClr val="tx1"/>
-                </a:solidFill>
-              </a:rPr>
-              <a:t>너는 초등학교 영양교사야. </a:t>
-            </a:r>
-            <a:pPr eaLnBrk="0" indent="0" marL="0">
-              <a:lnSpc>
-                <a:spcPct val="135000"/>
-              </a:lnSpc>
-              <a:buNone/>
-            </a:pPr>
-            <a:r>
-              <a:rPr lang="en-US" sz="2200" b="1" dirty="0">
-                <a:solidFill>
-                  <a:schemeClr val="accent2"/>
-                </a:solidFill>
-                <a:highlight>
-                  <a:srgbClr val="FFE6D5"/>
-                </a:highlight>
-              </a:rPr>
-              <a:t>2026년 5월</a:t>
-            </a:r>
-            <a:pPr eaLnBrk="0" indent="0" marL="0">
-              <a:lnSpc>
-                <a:spcPct val="135000"/>
-              </a:lnSpc>
-              <a:buNone/>
-            </a:pPr>
-            <a:r>
-              <a:rPr lang="en-US" sz="2200" dirty="0">
-                <a:solidFill>
-                  <a:schemeClr val="tx1"/>
-                </a:solidFill>
-              </a:rPr>
-              <a:t> '채소 섭취 늘리기 주간' 운영 계획서 초안을 작성해줘. 포함될 내용은 </a:t>
-            </a:r>
-            <a:pPr eaLnBrk="0" indent="0" marL="0">
-              <a:lnSpc>
-                <a:spcPct val="135000"/>
-              </a:lnSpc>
-              <a:buNone/>
-            </a:pPr>
-            <a:r>
-              <a:rPr lang="en-US" sz="2200" b="1" dirty="0">
-                <a:solidFill>
-                  <a:schemeClr val="accent2"/>
-                </a:solidFill>
-                <a:highlight>
-                  <a:srgbClr val="FFE6D5"/>
-                </a:highlight>
-              </a:rPr>
-              <a:t>운영 목적, 기간, 주요 활동(잔반 줄이기 이벤트, 영양퀴즈), 가정 연계 방안</a:t>
-            </a:r>
-            <a:pPr eaLnBrk="0" indent="0" marL="0">
-              <a:lnSpc>
-                <a:spcPct val="135000"/>
-              </a:lnSpc>
-              <a:buNone/>
-            </a:pPr>
-            <a:r>
-              <a:rPr lang="en-US" sz="2200" dirty="0">
-                <a:solidFill>
-                  <a:schemeClr val="tx1"/>
-                </a:solidFill>
-              </a:rPr>
-              <a:t>이야. 공문서 스타일의 격식 있는 문체로 작성해줘.</a:t>
-            </a:r>
-            <a:endParaRPr lang="en-US" sz="2200" dirty="0"/>
-          </a:p>
-        </p:txBody>
-      </p:sp>
-      <p:pic>
-        <p:nvPicPr>
-          <p:cNvPr id="9" name="hint icon" descr="preencoded.png">    </p:cNvPr>
-          <p:cNvPicPr>
-            <a:picLocks noChangeAspect="1"/>
-          </p:cNvPicPr>
-          <p:nvPr/>
-        </p:nvPicPr>
-        <p:blipFill>
-          <a:blip r:embed="rId2"/>
-          <a:stretch>
-            <a:fillRect/>
-          </a:stretch>
-        </p:blipFill>
-        <p:spPr>
-          <a:xfrm>
-            <a:off x="4892040" y="5833872"/>
-            <a:ext cx="256032" cy="256032"/>
-          </a:xfrm>
-          <a:prstGeom prst="rect">
-            <a:avLst/>
-          </a:prstGeom>
-        </p:spPr>
-      </p:pic>
-      <p:sp>
-        <p:nvSpPr>
-          <p:cNvPr id="10" name="hint"/>
-          <p:cNvSpPr txBox="1"/>
-          <p:nvPr/>
-        </p:nvSpPr>
-        <p:spPr>
-          <a:xfrm>
-            <a:off x="5257800" y="5760720"/>
-            <a:ext cx="6400800" cy="411480"/>
-          </a:xfrm>
-          <a:prstGeom prst="rect">
-            <a:avLst/>
-          </a:prstGeom>
-          <a:noFill/>
-          <a:ln/>
-        </p:spPr>
-        <p:txBody>
-          <a:bodyPr wrap="square" lIns="0" tIns="0" rIns="0" bIns="0" rtlCol="0" anchor="ctr"/>
-          <a:lstStyle/>
-          <a:p>
-            <a:pPr eaLnBrk="0" indent="0" marL="0">
               <a:buNone/>
             </a:pPr>
             <a:r>
               <a:rPr lang="en-US" sz="1500" b="1" dirty="0">
                 <a:solidFill>
-                  <a:schemeClr val="accent2"/>
-                </a:solidFill>
-              </a:rPr>
-              <a:t>주황색 부분</a:t>
+                  <a:schemeClr val="accent1"/>
+                </a:solidFill>
+              </a:rPr>
+              <a:t>청록색 부분</a:t>
             </a:r>
             <a:pPr eaLnBrk="0" indent="0" marL="0">
               <a:buNone/>
@@ -2384,7 +1889,7 @@
             <a:r>
               <a:rPr lang="en-US" sz="1500" dirty="0">
                 <a:solidFill>
-                  <a:schemeClr val="accent6"/>
+                  <a:schemeClr val="accent3"/>
                 </a:solidFill>
               </a:rPr>
               <a:t>만 우리 학교 상황에 맞게 바꿔서 쓰세요</a:t>
@@ -2405,8 +1910,8 @@
         </p:nvSpPr>
         <p:spPr>
           <a:xfrm>
-            <a:off x="11247120" y="6355080"/>
-            <a:ext cx="457200" cy="274320"/>
+            <a:off x="11155680" y="6355080"/>
+            <a:ext cx="548640" cy="274320"/>
           </a:xfrm>
           <a:prstGeom prst="rect">
             <a:avLst/>
@@ -2423,7 +1928,7 @@
             <a:lvl1pPr>
               <a:defRPr sz="1000">
                 <a:solidFill>
-                  <a:schemeClr val="accent6"/>
+                  <a:schemeClr val="accent4"/>
                 </a:solidFill>
               </a:defRPr>
             </a:lvl1pPr>
@@ -2465,14 +1970,14 @@
       </p:grpSpPr>
       <p:sp>
         <p:nvSpPr>
-          <p:cNvPr id="2" name="number"/>
+          <p:cNvPr id="2" name="kicker"/>
           <p:cNvSpPr txBox="1"/>
           <p:nvPr/>
         </p:nvSpPr>
         <p:spPr>
           <a:xfrm>
-            <a:off x="548640" y="640080"/>
-            <a:ext cx="3108960" cy="1188720"/>
+            <a:off x="914400" y="594360"/>
+            <a:ext cx="10058400" cy="365760"/>
           </a:xfrm>
           <a:prstGeom prst="rect">
             <a:avLst/>
@@ -2488,29 +1993,29 @@
               <a:buNone/>
             </a:pPr>
             <a:r>
-              <a:rPr lang="en-US" sz="8000" b="1" dirty="0">
-                <a:solidFill>
-                  <a:schemeClr val="accent2"/>
-                </a:solidFill>
-              </a:rPr>
-              <a:t>02</a:t>
-            </a:r>
-            <a:endParaRPr lang="en-US" sz="8000" dirty="0"/>
-          </a:p>
-        </p:txBody>
-      </p:sp>
-      <p:sp>
-        <p:nvSpPr>
-          <p:cNvPr id="3" name="Text 1"/>
+              <a:rPr lang="en-US" sz="1500" b="1" spc="400" kern="0" dirty="0">
+                <a:solidFill>
+                  <a:schemeClr val="accent1"/>
+                </a:solidFill>
+              </a:rPr>
+              <a:t>PROMPT 02 · 가정통신문</a:t>
+            </a:r>
+            <a:endParaRPr lang="en-US" sz="1500" dirty="0"/>
+          </a:p>
+        </p:txBody>
+      </p:sp>
+      <p:sp>
+        <p:nvSpPr>
+          <p:cNvPr id="3" name="Text 0"/>
           <p:cNvSpPr/>
           <p:nvPr>
-            <p:ph idx="101" type="title" hasCustomPrompt="1"/>
+            <p:ph idx="100" type="title" hasCustomPrompt="1"/>
           </p:nvPr>
         </p:nvSpPr>
         <p:spPr>
           <a:xfrm>
-            <a:off x="548640" y="2514600"/>
-            <a:ext cx="3291840" cy="1645920"/>
+            <a:off x="914400" y="960120"/>
+            <a:ext cx="10332720" cy="822960"/>
           </a:xfrm>
           <a:prstGeom prst="rect">
             <a:avLst/>
@@ -2519,92 +2024,61 @@
           <a:ln/>
         </p:spPr>
         <p:txBody>
-          <a:bodyPr wrap="square" lIns="0" tIns="0" rIns="0" bIns="0" rtlCol="0" anchor="t"/>
+          <a:bodyPr wrap="square" lIns="0" tIns="0" rIns="0" bIns="0" rtlCol="0" anchor="ctr"/>
           <a:lstStyle/>
           <a:p>
             <a:pPr eaLnBrk="0" algn="l" indent="0" marL="0">
               <a:buNone/>
             </a:pPr>
             <a:r>
-              <a:rPr lang="en-US" sz="3000" b="1" dirty="0">
+              <a:rPr lang="en-US" sz="3400" b="1" dirty="0">
                 <a:solidFill>
                   <a:schemeClr val="bg1"/>
                 </a:solidFill>
               </a:rPr>
-              <a:t>가정통신문</a:t>
-            </a:r>
-            <a:endParaRPr lang="en-US" sz="3000" dirty="0"/>
-          </a:p>
-          <a:p>
-            <a:pPr eaLnBrk="0" algn="l" indent="0" marL="0">
-              <a:buNone/>
-            </a:pPr>
-            <a:r>
-              <a:rPr lang="en-US" sz="3000" b="1" dirty="0">
-                <a:solidFill>
-                  <a:schemeClr val="bg1"/>
-                </a:solidFill>
-              </a:rPr>
-              <a:t>작성</a:t>
-            </a:r>
-            <a:endParaRPr lang="en-US" sz="3000" dirty="0"/>
-          </a:p>
-        </p:txBody>
-      </p:sp>
-      <p:sp>
-        <p:nvSpPr>
-          <p:cNvPr id="4" name="category icon circle"/>
+              <a:t>가정통신문 작성</a:t>
+            </a:r>
+            <a:endParaRPr lang="en-US" sz="3400" dirty="0"/>
+          </a:p>
+        </p:txBody>
+      </p:sp>
+      <p:sp>
+        <p:nvSpPr>
+          <p:cNvPr id="4" name="prompt card"/>
           <p:cNvSpPr/>
           <p:nvPr/>
         </p:nvSpPr>
         <p:spPr>
           <a:xfrm>
-            <a:off x="548640" y="5029200"/>
-            <a:ext cx="868680" cy="868680"/>
-          </a:xfrm>
-          <a:prstGeom prst="ellipse">
-            <a:avLst/>
+            <a:off x="914400" y="2148840"/>
+            <a:ext cx="10332720" cy="3429000"/>
+          </a:xfrm>
+          <a:prstGeom prst="roundRect">
+            <a:avLst>
+              <a:gd name="adj" fmla="val 4800"/>
+            </a:avLst>
           </a:prstGeom>
           <a:solidFill>
-            <a:schemeClr val="bg1"/>
+            <a:schemeClr val="tx2"/>
           </a:solidFill>
-          <a:ln/>
-        </p:spPr>
-      </p:sp>
-      <p:pic>
-        <p:nvPicPr>
-          <p:cNvPr id="5" name="category icon" descr="preencoded.png">    </p:cNvPr>
-          <p:cNvPicPr>
-            <a:picLocks noChangeAspect="1"/>
-          </p:cNvPicPr>
-          <p:nvPr/>
-        </p:nvPicPr>
-        <p:blipFill>
-          <a:blip r:embed="rId1"/>
-          <a:stretch>
-            <a:fillRect/>
-          </a:stretch>
-        </p:blipFill>
-        <p:spPr>
-          <a:xfrm>
-            <a:off x="749808" y="5230368"/>
-            <a:ext cx="466344" cy="466344"/>
-          </a:xfrm>
-          <a:prstGeom prst="rect">
-            <a:avLst/>
-          </a:prstGeom>
-        </p:spPr>
-      </p:pic>
-      <p:sp>
-        <p:nvSpPr>
-          <p:cNvPr id="6" name="prompt label"/>
+          <a:ln w="12700">
+            <a:solidFill>
+              <a:schemeClr val="accent5"/>
+            </a:solidFill>
+            <a:prstDash val="solid"/>
+          </a:ln>
+        </p:spPr>
+      </p:sp>
+      <p:sp>
+        <p:nvSpPr>
+          <p:cNvPr id="5" name="prompt text"/>
           <p:cNvSpPr txBox="1"/>
           <p:nvPr/>
         </p:nvSpPr>
         <p:spPr>
           <a:xfrm>
-            <a:off x="4846320" y="685800"/>
-            <a:ext cx="3657600" cy="411480"/>
+            <a:off x="1417320" y="2377440"/>
+            <a:ext cx="9326880" cy="2971800"/>
           </a:xfrm>
           <a:prstGeom prst="rect">
             <a:avLst/>
@@ -2617,59 +2091,117 @@
           <a:lstStyle/>
           <a:p>
             <a:pPr eaLnBrk="0" indent="0" marL="0">
-              <a:buNone/>
-            </a:pPr>
-            <a:r>
-              <a:rPr lang="en-US" sz="1600" b="1" dirty="0">
-                <a:solidFill>
-                  <a:schemeClr val="accent3"/>
-                </a:solidFill>
-              </a:rPr>
-              <a:t>프롬프트 예시</a:t>
-            </a:r>
-            <a:endParaRPr lang="en-US" sz="1600" dirty="0"/>
-          </a:p>
-        </p:txBody>
-      </p:sp>
-      <p:sp>
-        <p:nvSpPr>
-          <p:cNvPr id="7" name="prompt bubble"/>
-          <p:cNvSpPr/>
-          <p:nvPr/>
-        </p:nvSpPr>
-        <p:spPr>
-          <a:xfrm>
-            <a:off x="4846320" y="1280160"/>
-            <a:ext cx="6766560" cy="4206240"/>
-          </a:xfrm>
-          <a:prstGeom prst="roundRect">
-            <a:avLst>
-              <a:gd name="adj" fmla="val 7609"/>
-            </a:avLst>
-          </a:prstGeom>
-          <a:solidFill>
-            <a:schemeClr val="bg2"/>
-          </a:solidFill>
-          <a:ln/>
-          <a:effectLst>
-            <a:outerShdw sx="100000" sy="100000" kx="0" ky="0" algn="bl" rotWithShape="0" blurRad="127000" dist="38100" dir="5400000">
-              <a:srgbClr val="17382B">
-                <a:alpha val="12000"/>
-              </a:srgbClr>
-            </a:outerShdw>
-          </a:effectLst>
-        </p:spPr>
-      </p:sp>
-      <p:sp>
-        <p:nvSpPr>
-          <p:cNvPr id="8" name="prompt text"/>
+              <a:lnSpc>
+                <a:spcPct val="145000"/>
+              </a:lnSpc>
+              <a:buNone/>
+            </a:pPr>
+            <a:r>
+              <a:rPr lang="en-US" sz="2300" dirty="0">
+                <a:solidFill>
+                  <a:schemeClr val="bg2"/>
+                </a:solidFill>
+              </a:rPr>
+              <a:t>학부모에게 발송할 가정통신문을 작성해줘. 주제는 </a:t>
+            </a:r>
+            <a:pPr eaLnBrk="0" indent="0" marL="0">
+              <a:lnSpc>
+                <a:spcPct val="145000"/>
+              </a:lnSpc>
+              <a:buNone/>
+            </a:pPr>
+            <a:r>
+              <a:rPr lang="en-US" sz="2300" b="1" dirty="0">
+                <a:solidFill>
+                  <a:schemeClr val="accent1"/>
+                </a:solidFill>
+              </a:rPr>
+              <a:t>편식 예방을 위한 영양교육 안내</a:t>
+            </a:r>
+            <a:pPr eaLnBrk="0" indent="0" marL="0">
+              <a:lnSpc>
+                <a:spcPct val="145000"/>
+              </a:lnSpc>
+              <a:buNone/>
+            </a:pPr>
+            <a:r>
+              <a:rPr lang="en-US" sz="2300" dirty="0">
+                <a:solidFill>
+                  <a:schemeClr val="bg2"/>
+                </a:solidFill>
+              </a:rPr>
+              <a:t>이고, 톤은 </a:t>
+            </a:r>
+            <a:pPr eaLnBrk="0" indent="0" marL="0">
+              <a:lnSpc>
+                <a:spcPct val="145000"/>
+              </a:lnSpc>
+              <a:buNone/>
+            </a:pPr>
+            <a:r>
+              <a:rPr lang="en-US" sz="2300" b="1" dirty="0">
+                <a:solidFill>
+                  <a:schemeClr val="accent1"/>
+                </a:solidFill>
+              </a:rPr>
+              <a:t>따뜻하고 친근하면서도 전문성 있는</a:t>
+            </a:r>
+            <a:pPr eaLnBrk="0" indent="0" marL="0">
+              <a:lnSpc>
+                <a:spcPct val="145000"/>
+              </a:lnSpc>
+              <a:buNone/>
+            </a:pPr>
+            <a:r>
+              <a:rPr lang="en-US" sz="2300" dirty="0">
+                <a:solidFill>
+                  <a:schemeClr val="bg2"/>
+                </a:solidFill>
+              </a:rPr>
+              <a:t> 느낌으로 해줘. 구성은 </a:t>
+            </a:r>
+            <a:pPr eaLnBrk="0" indent="0" marL="0">
+              <a:lnSpc>
+                <a:spcPct val="145000"/>
+              </a:lnSpc>
+              <a:buNone/>
+            </a:pPr>
+            <a:r>
+              <a:rPr lang="en-US" sz="2300" b="1" dirty="0">
+                <a:solidFill>
+                  <a:schemeClr val="accent1"/>
+                </a:solidFill>
+              </a:rPr>
+              <a:t>인사말 → 편식의 문제점 → 가정 내 지도 방법 → 마무리 인사</a:t>
+            </a:r>
+            <a:pPr eaLnBrk="0" indent="0" marL="0">
+              <a:lnSpc>
+                <a:spcPct val="145000"/>
+              </a:lnSpc>
+              <a:buNone/>
+            </a:pPr>
+            <a:r>
+              <a:rPr lang="en-US" sz="2300" dirty="0">
+                <a:solidFill>
+                  <a:schemeClr val="bg2"/>
+                </a:solidFill>
+              </a:rPr>
+              <a:t> 순서로 3문단 내외로 요약해줘.</a:t>
+            </a:r>
+            <a:endParaRPr lang="en-US" sz="2300" dirty="0"/>
+          </a:p>
+        </p:txBody>
+      </p:sp>
+      <p:sp>
+        <p:nvSpPr>
+          <p:cNvPr id="6" name="hint"/>
           <p:cNvSpPr txBox="1"/>
           <p:nvPr/>
         </p:nvSpPr>
         <p:spPr>
           <a:xfrm>
-            <a:off x="5257800" y="1600200"/>
-            <a:ext cx="5943600" cy="3566160"/>
+            <a:off x="914400" y="5806440"/>
+            <a:ext cx="9144000" cy="365760"/>
           </a:xfrm>
           <a:prstGeom prst="rect">
             <a:avLst/>
@@ -2682,171 +2214,15 @@
           <a:lstStyle/>
           <a:p>
             <a:pPr eaLnBrk="0" indent="0" marL="0">
-              <a:lnSpc>
-                <a:spcPct val="135000"/>
-              </a:lnSpc>
-              <a:buNone/>
-            </a:pPr>
-            <a:r>
-              <a:rPr lang="en-US" sz="2200" dirty="0">
-                <a:solidFill>
-                  <a:schemeClr val="tx1"/>
-                </a:solidFill>
-              </a:rPr>
-              <a:t>학부모에게 발송할 가정통신문을 작성해줘. 주제는 </a:t>
-            </a:r>
-            <a:pPr eaLnBrk="0" indent="0" marL="0">
-              <a:lnSpc>
-                <a:spcPct val="135000"/>
-              </a:lnSpc>
-              <a:buNone/>
-            </a:pPr>
-            <a:r>
-              <a:rPr lang="en-US" sz="2200" b="1" dirty="0">
-                <a:solidFill>
-                  <a:schemeClr val="accent2"/>
-                </a:solidFill>
-                <a:highlight>
-                  <a:srgbClr val="FFE6D5"/>
-                </a:highlight>
-              </a:rPr>
-              <a:t>편식 예방을 위한 영양교육 안내</a:t>
-            </a:r>
-            <a:pPr eaLnBrk="0" indent="0" marL="0">
-              <a:lnSpc>
-                <a:spcPct val="135000"/>
-              </a:lnSpc>
-              <a:buNone/>
-            </a:pPr>
-            <a:r>
-              <a:rPr lang="en-US" sz="2200" dirty="0">
-                <a:solidFill>
-                  <a:schemeClr val="tx1"/>
-                </a:solidFill>
-              </a:rPr>
-              <a:t>이고, 톤은 </a:t>
-            </a:r>
-            <a:pPr eaLnBrk="0" indent="0" marL="0">
-              <a:lnSpc>
-                <a:spcPct val="135000"/>
-              </a:lnSpc>
-              <a:buNone/>
-            </a:pPr>
-            <a:r>
-              <a:rPr lang="en-US" sz="2200" b="1" dirty="0">
-                <a:solidFill>
-                  <a:schemeClr val="accent2"/>
-                </a:solidFill>
-                <a:highlight>
-                  <a:srgbClr val="FFE6D5"/>
-                </a:highlight>
-              </a:rPr>
-              <a:t>따뜻하고 친근하면서도 전문성 있는</a:t>
-            </a:r>
-            <a:pPr eaLnBrk="0" indent="0" marL="0">
-              <a:lnSpc>
-                <a:spcPct val="135000"/>
-              </a:lnSpc>
-              <a:buNone/>
-            </a:pPr>
-            <a:r>
-              <a:rPr lang="en-US" sz="2200" dirty="0">
-                <a:solidFill>
-                  <a:schemeClr val="tx1"/>
-                </a:solidFill>
-              </a:rPr>
-              <a:t> 느낌으로 해줘. 구성은 </a:t>
-            </a:r>
-            <a:pPr eaLnBrk="0" indent="0" marL="0">
-              <a:lnSpc>
-                <a:spcPct val="135000"/>
-              </a:lnSpc>
-              <a:buNone/>
-            </a:pPr>
-            <a:r>
-              <a:rPr lang="en-US" sz="2200" b="1" dirty="0">
-                <a:solidFill>
-                  <a:schemeClr val="accent2"/>
-                </a:solidFill>
-                <a:highlight>
-                  <a:srgbClr val="FFE6D5"/>
-                </a:highlight>
-              </a:rPr>
-              <a:t>인사말 → 편식의 문제점 → 가정 내 지도 방법 → 마무리 인사</a:t>
-            </a:r>
-            <a:pPr eaLnBrk="0" indent="0" marL="0">
-              <a:lnSpc>
-                <a:spcPct val="135000"/>
-              </a:lnSpc>
-              <a:buNone/>
-            </a:pPr>
-            <a:r>
-              <a:rPr lang="en-US" sz="2200" dirty="0">
-                <a:solidFill>
-                  <a:schemeClr val="tx1"/>
-                </a:solidFill>
-              </a:rPr>
-              <a:t> 순서로 3문단 내외로 요약해줘.</a:t>
-            </a:r>
-            <a:endParaRPr lang="en-US" sz="2200" dirty="0"/>
-          </a:p>
-        </p:txBody>
-      </p:sp>
-      <p:pic>
-        <p:nvPicPr>
-          <p:cNvPr id="9" name="hint icon" descr="preencoded.png">    </p:cNvPr>
-          <p:cNvPicPr>
-            <a:picLocks noChangeAspect="1"/>
-          </p:cNvPicPr>
-          <p:nvPr/>
-        </p:nvPicPr>
-        <p:blipFill>
-          <a:blip r:embed="rId2"/>
-          <a:stretch>
-            <a:fillRect/>
-          </a:stretch>
-        </p:blipFill>
-        <p:spPr>
-          <a:xfrm>
-            <a:off x="4892040" y="5833872"/>
-            <a:ext cx="256032" cy="256032"/>
-          </a:xfrm>
-          <a:prstGeom prst="rect">
-            <a:avLst/>
-          </a:prstGeom>
-        </p:spPr>
-      </p:pic>
-      <p:sp>
-        <p:nvSpPr>
-          <p:cNvPr id="10" name="hint"/>
-          <p:cNvSpPr txBox="1"/>
-          <p:nvPr/>
-        </p:nvSpPr>
-        <p:spPr>
-          <a:xfrm>
-            <a:off x="5257800" y="5760720"/>
-            <a:ext cx="6400800" cy="411480"/>
-          </a:xfrm>
-          <a:prstGeom prst="rect">
-            <a:avLst/>
-          </a:prstGeom>
-          <a:noFill/>
-          <a:ln/>
-        </p:spPr>
-        <p:txBody>
-          <a:bodyPr wrap="square" lIns="0" tIns="0" rIns="0" bIns="0" rtlCol="0" anchor="ctr"/>
-          <a:lstStyle/>
-          <a:p>
-            <a:pPr eaLnBrk="0" indent="0" marL="0">
               <a:buNone/>
             </a:pPr>
             <a:r>
               <a:rPr lang="en-US" sz="1500" b="1" dirty="0">
                 <a:solidFill>
-                  <a:schemeClr val="accent2"/>
-                </a:solidFill>
-              </a:rPr>
-              <a:t>주황색 부분</a:t>
+                  <a:schemeClr val="accent1"/>
+                </a:solidFill>
+              </a:rPr>
+              <a:t>청록색 부분</a:t>
             </a:r>
             <a:pPr eaLnBrk="0" indent="0" marL="0">
               <a:buNone/>
@@ -2854,7 +2230,7 @@
             <a:r>
               <a:rPr lang="en-US" sz="1500" dirty="0">
                 <a:solidFill>
-                  <a:schemeClr val="accent6"/>
+                  <a:schemeClr val="accent3"/>
                 </a:solidFill>
               </a:rPr>
               <a:t>만 우리 학교 상황에 맞게 바꿔서 쓰세요</a:t>
@@ -2875,8 +2251,8 @@
         </p:nvSpPr>
         <p:spPr>
           <a:xfrm>
-            <a:off x="11247120" y="6355080"/>
-            <a:ext cx="457200" cy="274320"/>
+            <a:off x="11155680" y="6355080"/>
+            <a:ext cx="548640" cy="274320"/>
           </a:xfrm>
           <a:prstGeom prst="rect">
             <a:avLst/>
@@ -2893,7 +2269,7 @@
             <a:lvl1pPr>
               <a:defRPr sz="1000">
                 <a:solidFill>
-                  <a:schemeClr val="accent6"/>
+                  <a:schemeClr val="accent4"/>
                 </a:solidFill>
               </a:defRPr>
             </a:lvl1pPr>
@@ -2935,14 +2311,14 @@
       </p:grpSpPr>
       <p:sp>
         <p:nvSpPr>
-          <p:cNvPr id="2" name="number"/>
+          <p:cNvPr id="2" name="kicker"/>
           <p:cNvSpPr txBox="1"/>
           <p:nvPr/>
         </p:nvSpPr>
         <p:spPr>
           <a:xfrm>
-            <a:off x="548640" y="640080"/>
-            <a:ext cx="3108960" cy="1188720"/>
+            <a:off x="914400" y="594360"/>
+            <a:ext cx="10058400" cy="365760"/>
           </a:xfrm>
           <a:prstGeom prst="rect">
             <a:avLst/>
@@ -2958,29 +2334,29 @@
               <a:buNone/>
             </a:pPr>
             <a:r>
-              <a:rPr lang="en-US" sz="8000" b="1" dirty="0">
-                <a:solidFill>
-                  <a:schemeClr val="accent2"/>
-                </a:solidFill>
-              </a:rPr>
-              <a:t>03</a:t>
-            </a:r>
-            <a:endParaRPr lang="en-US" sz="8000" dirty="0"/>
-          </a:p>
-        </p:txBody>
-      </p:sp>
-      <p:sp>
-        <p:nvSpPr>
-          <p:cNvPr id="3" name="Text 1"/>
+              <a:rPr lang="en-US" sz="1500" b="1" spc="400" kern="0" dirty="0">
+                <a:solidFill>
+                  <a:schemeClr val="accent1"/>
+                </a:solidFill>
+              </a:rPr>
+              <a:t>PROMPT 03 · 회의록</a:t>
+            </a:r>
+            <a:endParaRPr lang="en-US" sz="1500" dirty="0"/>
+          </a:p>
+        </p:txBody>
+      </p:sp>
+      <p:sp>
+        <p:nvSpPr>
+          <p:cNvPr id="3" name="Text 0"/>
           <p:cNvSpPr/>
           <p:nvPr>
-            <p:ph idx="101" type="title" hasCustomPrompt="1"/>
+            <p:ph idx="100" type="title" hasCustomPrompt="1"/>
           </p:nvPr>
         </p:nvSpPr>
         <p:spPr>
           <a:xfrm>
-            <a:off x="548640" y="2514600"/>
-            <a:ext cx="3291840" cy="1645920"/>
+            <a:off x="914400" y="960120"/>
+            <a:ext cx="10332720" cy="822960"/>
           </a:xfrm>
           <a:prstGeom prst="rect">
             <a:avLst/>
@@ -2989,92 +2365,61 @@
           <a:ln/>
         </p:spPr>
         <p:txBody>
-          <a:bodyPr wrap="square" lIns="0" tIns="0" rIns="0" bIns="0" rtlCol="0" anchor="t"/>
+          <a:bodyPr wrap="square" lIns="0" tIns="0" rIns="0" bIns="0" rtlCol="0" anchor="ctr"/>
           <a:lstStyle/>
           <a:p>
             <a:pPr eaLnBrk="0" algn="l" indent="0" marL="0">
               <a:buNone/>
             </a:pPr>
             <a:r>
-              <a:rPr lang="en-US" sz="3000" b="1" dirty="0">
+              <a:rPr lang="en-US" sz="3400" b="1" dirty="0">
                 <a:solidFill>
                   <a:schemeClr val="bg1"/>
                 </a:solidFill>
               </a:rPr>
-              <a:t>학교급식소위원회</a:t>
-            </a:r>
-            <a:endParaRPr lang="en-US" sz="3000" dirty="0"/>
-          </a:p>
-          <a:p>
-            <a:pPr eaLnBrk="0" algn="l" indent="0" marL="0">
-              <a:buNone/>
-            </a:pPr>
-            <a:r>
-              <a:rPr lang="en-US" sz="3000" b="1" dirty="0">
-                <a:solidFill>
-                  <a:schemeClr val="bg1"/>
-                </a:solidFill>
-              </a:rPr>
-              <a:t>회의록 초안</a:t>
-            </a:r>
-            <a:endParaRPr lang="en-US" sz="3000" dirty="0"/>
-          </a:p>
-        </p:txBody>
-      </p:sp>
-      <p:sp>
-        <p:nvSpPr>
-          <p:cNvPr id="4" name="category icon circle"/>
+              <a:t>학교급식소위원회 회의록 초안</a:t>
+            </a:r>
+            <a:endParaRPr lang="en-US" sz="3400" dirty="0"/>
+          </a:p>
+        </p:txBody>
+      </p:sp>
+      <p:sp>
+        <p:nvSpPr>
+          <p:cNvPr id="4" name="prompt card"/>
           <p:cNvSpPr/>
           <p:nvPr/>
         </p:nvSpPr>
         <p:spPr>
           <a:xfrm>
-            <a:off x="548640" y="5029200"/>
-            <a:ext cx="868680" cy="868680"/>
-          </a:xfrm>
-          <a:prstGeom prst="ellipse">
-            <a:avLst/>
+            <a:off x="914400" y="2148840"/>
+            <a:ext cx="10332720" cy="3429000"/>
+          </a:xfrm>
+          <a:prstGeom prst="roundRect">
+            <a:avLst>
+              <a:gd name="adj" fmla="val 4800"/>
+            </a:avLst>
           </a:prstGeom>
           <a:solidFill>
-            <a:schemeClr val="bg1"/>
+            <a:schemeClr val="tx2"/>
           </a:solidFill>
-          <a:ln/>
-        </p:spPr>
-      </p:sp>
-      <p:pic>
-        <p:nvPicPr>
-          <p:cNvPr id="5" name="category icon" descr="preencoded.png">    </p:cNvPr>
-          <p:cNvPicPr>
-            <a:picLocks noChangeAspect="1"/>
-          </p:cNvPicPr>
-          <p:nvPr/>
-        </p:nvPicPr>
-        <p:blipFill>
-          <a:blip r:embed="rId1"/>
-          <a:stretch>
-            <a:fillRect/>
-          </a:stretch>
-        </p:blipFill>
-        <p:spPr>
-          <a:xfrm>
-            <a:off x="749808" y="5230368"/>
-            <a:ext cx="466344" cy="466344"/>
-          </a:xfrm>
-          <a:prstGeom prst="rect">
-            <a:avLst/>
-          </a:prstGeom>
-        </p:spPr>
-      </p:pic>
-      <p:sp>
-        <p:nvSpPr>
-          <p:cNvPr id="6" name="prompt label"/>
+          <a:ln w="12700">
+            <a:solidFill>
+              <a:schemeClr val="accent5"/>
+            </a:solidFill>
+            <a:prstDash val="solid"/>
+          </a:ln>
+        </p:spPr>
+      </p:sp>
+      <p:sp>
+        <p:nvSpPr>
+          <p:cNvPr id="5" name="prompt text"/>
           <p:cNvSpPr txBox="1"/>
           <p:nvPr/>
         </p:nvSpPr>
         <p:spPr>
           <a:xfrm>
-            <a:off x="4846320" y="685800"/>
-            <a:ext cx="3657600" cy="411480"/>
+            <a:off x="1417320" y="2377440"/>
+            <a:ext cx="9326880" cy="2971800"/>
           </a:xfrm>
           <a:prstGeom prst="rect">
             <a:avLst/>
@@ -3087,59 +2432,117 @@
           <a:lstStyle/>
           <a:p>
             <a:pPr eaLnBrk="0" indent="0" marL="0">
-              <a:buNone/>
-            </a:pPr>
-            <a:r>
-              <a:rPr lang="en-US" sz="1600" b="1" dirty="0">
-                <a:solidFill>
-                  <a:schemeClr val="accent3"/>
-                </a:solidFill>
-              </a:rPr>
-              <a:t>프롬프트 예시</a:t>
-            </a:r>
-            <a:endParaRPr lang="en-US" sz="1600" dirty="0"/>
-          </a:p>
-        </p:txBody>
-      </p:sp>
-      <p:sp>
-        <p:nvSpPr>
-          <p:cNvPr id="7" name="prompt bubble"/>
-          <p:cNvSpPr/>
-          <p:nvPr/>
-        </p:nvSpPr>
-        <p:spPr>
-          <a:xfrm>
-            <a:off x="4846320" y="1280160"/>
-            <a:ext cx="6766560" cy="4206240"/>
-          </a:xfrm>
-          <a:prstGeom prst="roundRect">
-            <a:avLst>
-              <a:gd name="adj" fmla="val 7609"/>
-            </a:avLst>
-          </a:prstGeom>
-          <a:solidFill>
-            <a:schemeClr val="bg2"/>
-          </a:solidFill>
-          <a:ln/>
-          <a:effectLst>
-            <a:outerShdw sx="100000" sy="100000" kx="0" ky="0" algn="bl" rotWithShape="0" blurRad="127000" dist="38100" dir="5400000">
-              <a:srgbClr val="17382B">
-                <a:alpha val="12000"/>
-              </a:srgbClr>
-            </a:outerShdw>
-          </a:effectLst>
-        </p:spPr>
-      </p:sp>
-      <p:sp>
-        <p:nvSpPr>
-          <p:cNvPr id="8" name="prompt text"/>
+              <a:lnSpc>
+                <a:spcPct val="145000"/>
+              </a:lnSpc>
+              <a:buNone/>
+            </a:pPr>
+            <a:r>
+              <a:rPr lang="en-US" sz="2300" dirty="0">
+                <a:solidFill>
+                  <a:schemeClr val="bg2"/>
+                </a:solidFill>
+              </a:rPr>
+              <a:t>학교급식소위원회 회의록 초안을 만들어줘. 안건은 </a:t>
+            </a:r>
+            <a:pPr eaLnBrk="0" indent="0" marL="0">
+              <a:lnSpc>
+                <a:spcPct val="145000"/>
+              </a:lnSpc>
+              <a:buNone/>
+            </a:pPr>
+            <a:r>
+              <a:rPr lang="en-US" sz="2300" b="1" dirty="0">
+                <a:solidFill>
+                  <a:schemeClr val="accent1"/>
+                </a:solidFill>
+              </a:rPr>
+              <a:t>1. 2학기 학교급식 식재료 납품업체 평가 결과 보고, 2. 영양·식생활교육 활성화 방안</a:t>
+            </a:r>
+            <a:pPr eaLnBrk="0" indent="0" marL="0">
+              <a:lnSpc>
+                <a:spcPct val="145000"/>
+              </a:lnSpc>
+              <a:buNone/>
+            </a:pPr>
+            <a:r>
+              <a:rPr lang="en-US" sz="2300" dirty="0">
+                <a:solidFill>
+                  <a:schemeClr val="bg2"/>
+                </a:solidFill>
+              </a:rPr>
+              <a:t>이야. 참석자는 </a:t>
+            </a:r>
+            <a:pPr eaLnBrk="0" indent="0" marL="0">
+              <a:lnSpc>
+                <a:spcPct val="145000"/>
+              </a:lnSpc>
+              <a:buNone/>
+            </a:pPr>
+            <a:r>
+              <a:rPr lang="en-US" sz="2300" b="1" dirty="0">
+                <a:solidFill>
+                  <a:schemeClr val="accent1"/>
+                </a:solidFill>
+              </a:rPr>
+              <a:t>위원장, 영양교사, 학부모위원 3명</a:t>
+            </a:r>
+            <a:pPr eaLnBrk="0" indent="0" marL="0">
+              <a:lnSpc>
+                <a:spcPct val="145000"/>
+              </a:lnSpc>
+              <a:buNone/>
+            </a:pPr>
+            <a:r>
+              <a:rPr lang="en-US" sz="2300" dirty="0">
+                <a:solidFill>
+                  <a:schemeClr val="bg2"/>
+                </a:solidFill>
+              </a:rPr>
+              <a:t>이고 결정된 주요 내용은 </a:t>
+            </a:r>
+            <a:pPr eaLnBrk="0" indent="0" marL="0">
+              <a:lnSpc>
+                <a:spcPct val="145000"/>
+              </a:lnSpc>
+              <a:buNone/>
+            </a:pPr>
+            <a:r>
+              <a:rPr lang="en-US" sz="2300" b="1" dirty="0">
+                <a:solidFill>
+                  <a:schemeClr val="accent1"/>
+                </a:solidFill>
+              </a:rPr>
+              <a:t>원안 동의</a:t>
+            </a:r>
+            <a:pPr eaLnBrk="0" indent="0" marL="0">
+              <a:lnSpc>
+                <a:spcPct val="145000"/>
+              </a:lnSpc>
+              <a:buNone/>
+            </a:pPr>
+            <a:r>
+              <a:rPr lang="en-US" sz="2300" dirty="0">
+                <a:solidFill>
+                  <a:schemeClr val="bg2"/>
+                </a:solidFill>
+              </a:rPr>
+              <a:t>야.</a:t>
+            </a:r>
+            <a:endParaRPr lang="en-US" sz="2300" dirty="0"/>
+          </a:p>
+        </p:txBody>
+      </p:sp>
+      <p:sp>
+        <p:nvSpPr>
+          <p:cNvPr id="6" name="hint"/>
           <p:cNvSpPr txBox="1"/>
           <p:nvPr/>
         </p:nvSpPr>
         <p:spPr>
           <a:xfrm>
-            <a:off x="5257800" y="1600200"/>
-            <a:ext cx="5943600" cy="3566160"/>
+            <a:off x="914400" y="5806440"/>
+            <a:ext cx="9144000" cy="365760"/>
           </a:xfrm>
           <a:prstGeom prst="rect">
             <a:avLst/>
@@ -3152,171 +2555,15 @@
           <a:lstStyle/>
           <a:p>
             <a:pPr eaLnBrk="0" indent="0" marL="0">
-              <a:lnSpc>
-                <a:spcPct val="135000"/>
-              </a:lnSpc>
-              <a:buNone/>
-            </a:pPr>
-            <a:r>
-              <a:rPr lang="en-US" sz="2200" dirty="0">
-                <a:solidFill>
-                  <a:schemeClr val="tx1"/>
-                </a:solidFill>
-              </a:rPr>
-              <a:t>학교급식소위원회 회의록 초안을 만들어줘. 안건은 </a:t>
-            </a:r>
-            <a:pPr eaLnBrk="0" indent="0" marL="0">
-              <a:lnSpc>
-                <a:spcPct val="135000"/>
-              </a:lnSpc>
-              <a:buNone/>
-            </a:pPr>
-            <a:r>
-              <a:rPr lang="en-US" sz="2200" b="1" dirty="0">
-                <a:solidFill>
-                  <a:schemeClr val="accent2"/>
-                </a:solidFill>
-                <a:highlight>
-                  <a:srgbClr val="FFE6D5"/>
-                </a:highlight>
-              </a:rPr>
-              <a:t>1. 2학기 학교급식 식재료 납품업체 평가 결과 보고, 2. 영양·식생활교육 활성화 방안</a:t>
-            </a:r>
-            <a:pPr eaLnBrk="0" indent="0" marL="0">
-              <a:lnSpc>
-                <a:spcPct val="135000"/>
-              </a:lnSpc>
-              <a:buNone/>
-            </a:pPr>
-            <a:r>
-              <a:rPr lang="en-US" sz="2200" dirty="0">
-                <a:solidFill>
-                  <a:schemeClr val="tx1"/>
-                </a:solidFill>
-              </a:rPr>
-              <a:t>이야. 참석자는 </a:t>
-            </a:r>
-            <a:pPr eaLnBrk="0" indent="0" marL="0">
-              <a:lnSpc>
-                <a:spcPct val="135000"/>
-              </a:lnSpc>
-              <a:buNone/>
-            </a:pPr>
-            <a:r>
-              <a:rPr lang="en-US" sz="2200" b="1" dirty="0">
-                <a:solidFill>
-                  <a:schemeClr val="accent2"/>
-                </a:solidFill>
-                <a:highlight>
-                  <a:srgbClr val="FFE6D5"/>
-                </a:highlight>
-              </a:rPr>
-              <a:t>위원장, 영양교사, 학부모위원 3명</a:t>
-            </a:r>
-            <a:pPr eaLnBrk="0" indent="0" marL="0">
-              <a:lnSpc>
-                <a:spcPct val="135000"/>
-              </a:lnSpc>
-              <a:buNone/>
-            </a:pPr>
-            <a:r>
-              <a:rPr lang="en-US" sz="2200" dirty="0">
-                <a:solidFill>
-                  <a:schemeClr val="tx1"/>
-                </a:solidFill>
-              </a:rPr>
-              <a:t>이고 결정된 주요 내용은 </a:t>
-            </a:r>
-            <a:pPr eaLnBrk="0" indent="0" marL="0">
-              <a:lnSpc>
-                <a:spcPct val="135000"/>
-              </a:lnSpc>
-              <a:buNone/>
-            </a:pPr>
-            <a:r>
-              <a:rPr lang="en-US" sz="2200" b="1" dirty="0">
-                <a:solidFill>
-                  <a:schemeClr val="accent2"/>
-                </a:solidFill>
-                <a:highlight>
-                  <a:srgbClr val="FFE6D5"/>
-                </a:highlight>
-              </a:rPr>
-              <a:t>원안 동의</a:t>
-            </a:r>
-            <a:pPr eaLnBrk="0" indent="0" marL="0">
-              <a:lnSpc>
-                <a:spcPct val="135000"/>
-              </a:lnSpc>
-              <a:buNone/>
-            </a:pPr>
-            <a:r>
-              <a:rPr lang="en-US" sz="2200" dirty="0">
-                <a:solidFill>
-                  <a:schemeClr val="tx1"/>
-                </a:solidFill>
-              </a:rPr>
-              <a:t>야.</a:t>
-            </a:r>
-            <a:endParaRPr lang="en-US" sz="2200" dirty="0"/>
-          </a:p>
-        </p:txBody>
-      </p:sp>
-      <p:pic>
-        <p:nvPicPr>
-          <p:cNvPr id="9" name="hint icon" descr="preencoded.png">    </p:cNvPr>
-          <p:cNvPicPr>
-            <a:picLocks noChangeAspect="1"/>
-          </p:cNvPicPr>
-          <p:nvPr/>
-        </p:nvPicPr>
-        <p:blipFill>
-          <a:blip r:embed="rId2"/>
-          <a:stretch>
-            <a:fillRect/>
-          </a:stretch>
-        </p:blipFill>
-        <p:spPr>
-          <a:xfrm>
-            <a:off x="4892040" y="5833872"/>
-            <a:ext cx="256032" cy="256032"/>
-          </a:xfrm>
-          <a:prstGeom prst="rect">
-            <a:avLst/>
-          </a:prstGeom>
-        </p:spPr>
-      </p:pic>
-      <p:sp>
-        <p:nvSpPr>
-          <p:cNvPr id="10" name="hint"/>
-          <p:cNvSpPr txBox="1"/>
-          <p:nvPr/>
-        </p:nvSpPr>
-        <p:spPr>
-          <a:xfrm>
-            <a:off x="5257800" y="5760720"/>
-            <a:ext cx="6400800" cy="411480"/>
-          </a:xfrm>
-          <a:prstGeom prst="rect">
-            <a:avLst/>
-          </a:prstGeom>
-          <a:noFill/>
-          <a:ln/>
-        </p:spPr>
-        <p:txBody>
-          <a:bodyPr wrap="square" lIns="0" tIns="0" rIns="0" bIns="0" rtlCol="0" anchor="ctr"/>
-          <a:lstStyle/>
-          <a:p>
-            <a:pPr eaLnBrk="0" indent="0" marL="0">
               <a:buNone/>
             </a:pPr>
             <a:r>
               <a:rPr lang="en-US" sz="1500" b="1" dirty="0">
                 <a:solidFill>
-                  <a:schemeClr val="accent2"/>
-                </a:solidFill>
-              </a:rPr>
-              <a:t>주황색 부분</a:t>
+                  <a:schemeClr val="accent1"/>
+                </a:solidFill>
+              </a:rPr>
+              <a:t>청록색 부분</a:t>
             </a:r>
             <a:pPr eaLnBrk="0" indent="0" marL="0">
               <a:buNone/>
@@ -3324,7 +2571,7 @@
             <a:r>
               <a:rPr lang="en-US" sz="1500" dirty="0">
                 <a:solidFill>
-                  <a:schemeClr val="accent6"/>
+                  <a:schemeClr val="accent3"/>
                 </a:solidFill>
               </a:rPr>
               <a:t>만 우리 학교 상황에 맞게 바꿔서 쓰세요</a:t>
@@ -3345,8 +2592,8 @@
         </p:nvSpPr>
         <p:spPr>
           <a:xfrm>
-            <a:off x="11247120" y="6355080"/>
-            <a:ext cx="457200" cy="274320"/>
+            <a:off x="11155680" y="6355080"/>
+            <a:ext cx="548640" cy="274320"/>
           </a:xfrm>
           <a:prstGeom prst="rect">
             <a:avLst/>
@@ -3363,7 +2610,7 @@
             <a:lvl1pPr>
               <a:defRPr sz="1000">
                 <a:solidFill>
-                  <a:schemeClr val="accent6"/>
+                  <a:schemeClr val="accent4"/>
                 </a:solidFill>
               </a:defRPr>
             </a:lvl1pPr>
@@ -3405,7 +2652,43 @@
       </p:grpSpPr>
       <p:sp>
         <p:nvSpPr>
-          <p:cNvPr id="2" name="Text 0"/>
+          <p:cNvPr id="2" name="kicker"/>
+          <p:cNvSpPr txBox="1"/>
+          <p:nvPr/>
+        </p:nvSpPr>
+        <p:spPr>
+          <a:xfrm>
+            <a:off x="914400" y="594360"/>
+            <a:ext cx="10058400" cy="365760"/>
+          </a:xfrm>
+          <a:prstGeom prst="rect">
+            <a:avLst/>
+          </a:prstGeom>
+          <a:noFill/>
+          <a:ln/>
+        </p:spPr>
+        <p:txBody>
+          <a:bodyPr wrap="square" lIns="0" tIns="0" rIns="0" bIns="0" rtlCol="0" anchor="ctr"/>
+          <a:lstStyle/>
+          <a:p>
+            <a:pPr eaLnBrk="0" indent="0" marL="0">
+              <a:buNone/>
+            </a:pPr>
+            <a:r>
+              <a:rPr lang="en-US" sz="1500" b="1" spc="400" kern="0" dirty="0">
+                <a:solidFill>
+                  <a:schemeClr val="accent1"/>
+                </a:solidFill>
+              </a:rPr>
+              <a:t>CHECK · 유의사항</a:t>
+            </a:r>
+            <a:endParaRPr lang="en-US" sz="1500" dirty="0"/>
+          </a:p>
+        </p:txBody>
+      </p:sp>
+      <p:sp>
+        <p:nvSpPr>
+          <p:cNvPr id="3" name="Text 0"/>
           <p:cNvSpPr/>
           <p:nvPr>
             <p:ph idx="100" type="title" hasCustomPrompt="1"/>
@@ -3413,8 +2696,8 @@
         </p:nvSpPr>
         <p:spPr>
           <a:xfrm>
-            <a:off x="640080" y="502920"/>
-            <a:ext cx="10881360" cy="822960"/>
+            <a:off x="914400" y="960120"/>
+            <a:ext cx="10332720" cy="822960"/>
           </a:xfrm>
           <a:prstGeom prst="rect">
             <a:avLst/>
@@ -3432,7 +2715,7 @@
             <a:r>
               <a:rPr lang="en-US" sz="3400" b="1" dirty="0">
                 <a:solidFill>
-                  <a:schemeClr val="tx2"/>
+                  <a:schemeClr val="bg1"/>
                 </a:solidFill>
               </a:rPr>
               <a:t>공문서 AI 활용 시 유의사항</a:t>
@@ -3443,321 +2726,41 @@
       </p:sp>
       <p:sp>
         <p:nvSpPr>
-          <p:cNvPr id="3" name="caution card 1"/>
+          <p:cNvPr id="4" name="caution card 1"/>
           <p:cNvSpPr/>
           <p:nvPr/>
         </p:nvSpPr>
         <p:spPr>
           <a:xfrm>
-            <a:off x="640080" y="1737360"/>
-            <a:ext cx="3429000" cy="4343400"/>
+            <a:off x="914400" y="2148840"/>
+            <a:ext cx="3246120" cy="3840480"/>
           </a:xfrm>
           <a:prstGeom prst="roundRect">
             <a:avLst>
-              <a:gd name="adj" fmla="val 8000"/>
+              <a:gd name="adj" fmla="val 5070"/>
             </a:avLst>
-          </a:prstGeom>
-          <a:solidFill>
-            <a:schemeClr val="bg1"/>
-          </a:solidFill>
-          <a:ln/>
-          <a:effectLst>
-            <a:outerShdw sx="100000" sy="100000" kx="0" ky="0" algn="bl" rotWithShape="0" blurRad="127000" dist="38100" dir="5400000">
-              <a:srgbClr val="17382B">
-                <a:alpha val="10000"/>
-              </a:srgbClr>
-            </a:outerShdw>
-          </a:effectLst>
-        </p:spPr>
-      </p:sp>
-      <p:sp>
-        <p:nvSpPr>
-          <p:cNvPr id="4" name="caution icon circle 1"/>
-          <p:cNvSpPr/>
-          <p:nvPr/>
-        </p:nvSpPr>
-        <p:spPr>
-          <a:xfrm>
-            <a:off x="1005840" y="2148840"/>
-            <a:ext cx="868680" cy="868680"/>
-          </a:xfrm>
-          <a:prstGeom prst="ellipse">
-            <a:avLst/>
-          </a:prstGeom>
-          <a:solidFill>
-            <a:schemeClr val="accent2"/>
-          </a:solidFill>
-          <a:ln/>
-        </p:spPr>
-      </p:sp>
-      <p:pic>
-        <p:nvPicPr>
-          <p:cNvPr id="5" name="caution icon 1" descr="preencoded.png">    </p:cNvPr>
-          <p:cNvPicPr>
-            <a:picLocks noChangeAspect="1"/>
-          </p:cNvPicPr>
-          <p:nvPr/>
-        </p:nvPicPr>
-        <p:blipFill>
-          <a:blip r:embed="rId1"/>
-          <a:stretch>
-            <a:fillRect/>
-          </a:stretch>
-        </p:blipFill>
-        <p:spPr>
-          <a:xfrm>
-            <a:off x="1234440" y="2377440"/>
-            <a:ext cx="411480" cy="411480"/>
-          </a:xfrm>
-          <a:prstGeom prst="rect">
-            <a:avLst/>
-          </a:prstGeom>
-        </p:spPr>
-      </p:pic>
-      <p:sp>
-        <p:nvSpPr>
-          <p:cNvPr id="6" name="caution number 1"/>
-          <p:cNvSpPr txBox="1"/>
-          <p:nvPr/>
-        </p:nvSpPr>
-        <p:spPr>
-          <a:xfrm>
-            <a:off x="2880360" y="2148840"/>
-            <a:ext cx="822960" cy="548640"/>
-          </a:xfrm>
-          <a:prstGeom prst="rect">
-            <a:avLst/>
-          </a:prstGeom>
-          <a:noFill/>
-          <a:ln/>
-        </p:spPr>
-        <p:txBody>
-          <a:bodyPr wrap="square" lIns="0" tIns="0" rIns="0" bIns="0" rtlCol="0" anchor="ctr"/>
-          <a:lstStyle/>
-          <a:p>
-            <a:pPr eaLnBrk="0" algn="r" indent="0" marL="0">
-              <a:buNone/>
-            </a:pPr>
-            <a:r>
-              <a:rPr lang="en-US" sz="2400" b="1" dirty="0">
-                <a:solidFill>
-                  <a:schemeClr val="accent5"/>
-                </a:solidFill>
-              </a:rPr>
-              <a:t>01</a:t>
-            </a:r>
-            <a:endParaRPr lang="en-US" sz="2400" dirty="0"/>
-          </a:p>
-        </p:txBody>
-      </p:sp>
-      <p:sp>
-        <p:nvSpPr>
-          <p:cNvPr id="7" name="caution title 1"/>
-          <p:cNvSpPr txBox="1"/>
-          <p:nvPr/>
-        </p:nvSpPr>
-        <p:spPr>
-          <a:xfrm>
-            <a:off x="1005840" y="3246120"/>
-            <a:ext cx="2697480" cy="1005840"/>
-          </a:xfrm>
-          <a:prstGeom prst="rect">
-            <a:avLst/>
-          </a:prstGeom>
-          <a:noFill/>
-          <a:ln/>
-        </p:spPr>
-        <p:txBody>
-          <a:bodyPr wrap="square" lIns="0" tIns="0" rIns="0" bIns="0" rtlCol="0" anchor="t"/>
-          <a:lstStyle/>
-          <a:p>
-            <a:pPr eaLnBrk="0" indent="0" marL="0">
-              <a:buNone/>
-            </a:pPr>
-            <a:r>
-              <a:rPr lang="en-US" sz="2200" b="1" dirty="0">
-                <a:solidFill>
-                  <a:schemeClr val="tx2"/>
-                </a:solidFill>
-              </a:rPr>
-              <a:t>개인정보 및</a:t>
-            </a:r>
-            <a:endParaRPr lang="en-US" sz="2200" dirty="0"/>
-          </a:p>
-          <a:p>
-            <a:pPr eaLnBrk="0" indent="0" marL="0">
-              <a:buNone/>
-            </a:pPr>
-            <a:r>
-              <a:rPr lang="en-US" sz="2200" b="1" dirty="0">
-                <a:solidFill>
-                  <a:schemeClr val="tx2"/>
-                </a:solidFill>
-              </a:rPr>
-              <a:t>내부 기밀 제외</a:t>
-            </a:r>
-            <a:endParaRPr lang="en-US" sz="2200" dirty="0"/>
-          </a:p>
-        </p:txBody>
-      </p:sp>
-      <p:sp>
-        <p:nvSpPr>
-          <p:cNvPr id="8" name="caution body 1"/>
-          <p:cNvSpPr txBox="1"/>
-          <p:nvPr/>
-        </p:nvSpPr>
-        <p:spPr>
-          <a:xfrm>
-            <a:off x="1005840" y="4343400"/>
-            <a:ext cx="2697480" cy="1188720"/>
-          </a:xfrm>
-          <a:prstGeom prst="rect">
-            <a:avLst/>
-          </a:prstGeom>
-          <a:noFill/>
-          <a:ln/>
-        </p:spPr>
-        <p:txBody>
-          <a:bodyPr wrap="square" lIns="0" tIns="0" rIns="0" bIns="0" rtlCol="0" anchor="t"/>
-          <a:lstStyle/>
-          <a:p>
-            <a:pPr eaLnBrk="0" indent="0" marL="0">
-              <a:lnSpc>
-                <a:spcPct val="120000"/>
-              </a:lnSpc>
-              <a:buNone/>
-            </a:pPr>
-            <a:r>
-              <a:rPr lang="en-US" sz="1600" dirty="0">
-                <a:solidFill>
-                  <a:schemeClr val="tx1"/>
-                </a:solidFill>
-              </a:rPr>
-              <a:t>학생 이름, 교직원 실명, 특정 업체명, 내부 결재 라인 등은 반드시 익명 처리</a:t>
-            </a:r>
-            <a:endParaRPr lang="en-US" sz="1600" dirty="0"/>
-          </a:p>
-        </p:txBody>
-      </p:sp>
-      <p:sp>
-        <p:nvSpPr>
-          <p:cNvPr id="9" name="caution example 1"/>
-          <p:cNvSpPr txBox="1"/>
-          <p:nvPr/>
-        </p:nvSpPr>
-        <p:spPr>
-          <a:xfrm>
-            <a:off x="1005840" y="5486400"/>
-            <a:ext cx="2697480" cy="365760"/>
-          </a:xfrm>
-          <a:prstGeom prst="rect">
-            <a:avLst/>
-          </a:prstGeom>
-          <a:noFill/>
-          <a:ln/>
-        </p:spPr>
-        <p:txBody>
-          <a:bodyPr wrap="square" lIns="0" tIns="0" rIns="0" bIns="0" rtlCol="0" anchor="ctr"/>
-          <a:lstStyle/>
-          <a:p>
-            <a:pPr eaLnBrk="0" indent="0" marL="0">
-              <a:buNone/>
-            </a:pPr>
-            <a:r>
-              <a:rPr lang="en-US" sz="1500" b="1" dirty="0">
-                <a:solidFill>
-                  <a:schemeClr val="accent2"/>
-                </a:solidFill>
-              </a:rPr>
-              <a:t>예) A학생, 00업체</a:t>
-            </a:r>
-            <a:endParaRPr lang="en-US" sz="1500" dirty="0"/>
-          </a:p>
-        </p:txBody>
-      </p:sp>
-      <p:sp>
-        <p:nvSpPr>
-          <p:cNvPr id="10" name="caution card 2"/>
-          <p:cNvSpPr/>
-          <p:nvPr/>
-        </p:nvSpPr>
-        <p:spPr>
-          <a:xfrm>
-            <a:off x="4343400" y="1737360"/>
-            <a:ext cx="3429000" cy="4343400"/>
-          </a:xfrm>
-          <a:prstGeom prst="roundRect">
-            <a:avLst>
-              <a:gd name="adj" fmla="val 8000"/>
-            </a:avLst>
-          </a:prstGeom>
-          <a:solidFill>
-            <a:schemeClr val="bg1"/>
-          </a:solidFill>
-          <a:ln/>
-          <a:effectLst>
-            <a:outerShdw sx="100000" sy="100000" kx="0" ky="0" algn="bl" rotWithShape="0" blurRad="127000" dist="38100" dir="5400000">
-              <a:srgbClr val="17382B">
-                <a:alpha val="10000"/>
-              </a:srgbClr>
-            </a:outerShdw>
-          </a:effectLst>
-        </p:spPr>
-      </p:sp>
-      <p:sp>
-        <p:nvSpPr>
-          <p:cNvPr id="11" name="caution icon circle 2"/>
-          <p:cNvSpPr/>
-          <p:nvPr/>
-        </p:nvSpPr>
-        <p:spPr>
-          <a:xfrm>
-            <a:off x="4709160" y="2148840"/>
-            <a:ext cx="868680" cy="868680"/>
-          </a:xfrm>
-          <a:prstGeom prst="ellipse">
-            <a:avLst/>
           </a:prstGeom>
           <a:solidFill>
             <a:schemeClr val="tx2"/>
           </a:solidFill>
-          <a:ln/>
-        </p:spPr>
-      </p:sp>
-      <p:pic>
-        <p:nvPicPr>
-          <p:cNvPr id="12" name="caution icon 2" descr="preencoded.png">    </p:cNvPr>
-          <p:cNvPicPr>
-            <a:picLocks noChangeAspect="1"/>
-          </p:cNvPicPr>
-          <p:nvPr/>
-        </p:nvPicPr>
-        <p:blipFill>
-          <a:blip r:embed="rId2"/>
-          <a:stretch>
-            <a:fillRect/>
-          </a:stretch>
-        </p:blipFill>
-        <p:spPr>
-          <a:xfrm>
-            <a:off x="4937760" y="2377440"/>
-            <a:ext cx="411480" cy="411480"/>
-          </a:xfrm>
-          <a:prstGeom prst="rect">
-            <a:avLst/>
-          </a:prstGeom>
-        </p:spPr>
-      </p:pic>
-      <p:sp>
-        <p:nvSpPr>
-          <p:cNvPr id="13" name="caution number 2"/>
+          <a:ln w="12700">
+            <a:solidFill>
+              <a:schemeClr val="accent5"/>
+            </a:solidFill>
+            <a:prstDash val="solid"/>
+          </a:ln>
+        </p:spPr>
+      </p:sp>
+      <p:sp>
+        <p:nvSpPr>
+          <p:cNvPr id="5" name="caution number 1"/>
           <p:cNvSpPr txBox="1"/>
           <p:nvPr/>
         </p:nvSpPr>
         <p:spPr>
           <a:xfrm>
-            <a:off x="6583680" y="2148840"/>
-            <a:ext cx="822960" cy="548640"/>
+            <a:off x="1280160" y="2468880"/>
+            <a:ext cx="1097280" cy="548640"/>
           </a:xfrm>
           <a:prstGeom prst="rect">
             <a:avLst/>
@@ -3769,31 +2772,31 @@
           <a:bodyPr wrap="square" lIns="0" tIns="0" rIns="0" bIns="0" rtlCol="0" anchor="ctr"/>
           <a:lstStyle/>
           <a:p>
-            <a:pPr eaLnBrk="0" algn="r" indent="0" marL="0">
-              <a:buNone/>
-            </a:pPr>
-            <a:r>
-              <a:rPr lang="en-US" sz="2400" b="1" dirty="0">
-                <a:solidFill>
-                  <a:schemeClr val="accent5"/>
-                </a:solidFill>
-              </a:rPr>
-              <a:t>02</a:t>
-            </a:r>
-            <a:endParaRPr lang="en-US" sz="2400" dirty="0"/>
-          </a:p>
-        </p:txBody>
-      </p:sp>
-      <p:sp>
-        <p:nvSpPr>
-          <p:cNvPr id="14" name="caution title 2"/>
+            <a:pPr eaLnBrk="0" indent="0" marL="0">
+              <a:buNone/>
+            </a:pPr>
+            <a:r>
+              <a:rPr lang="en-US" sz="2800" b="1" dirty="0">
+                <a:solidFill>
+                  <a:schemeClr val="accent1"/>
+                </a:solidFill>
+              </a:rPr>
+              <a:t>01</a:t>
+            </a:r>
+            <a:endParaRPr lang="en-US" sz="2800" dirty="0"/>
+          </a:p>
+        </p:txBody>
+      </p:sp>
+      <p:sp>
+        <p:nvSpPr>
+          <p:cNvPr id="6" name="caution title 1"/>
           <p:cNvSpPr txBox="1"/>
           <p:nvPr/>
         </p:nvSpPr>
         <p:spPr>
           <a:xfrm>
-            <a:off x="4709160" y="3246120"/>
-            <a:ext cx="2697480" cy="1005840"/>
+            <a:off x="1280160" y="3154680"/>
+            <a:ext cx="2514600" cy="960120"/>
           </a:xfrm>
           <a:prstGeom prst="rect">
             <a:avLst/>
@@ -3811,10 +2814,10 @@
             <a:r>
               <a:rPr lang="en-US" sz="2200" b="1" dirty="0">
                 <a:solidFill>
-                  <a:schemeClr val="tx2"/>
-                </a:solidFill>
-              </a:rPr>
-              <a:t>사실관계 및</a:t>
+                  <a:schemeClr val="bg1"/>
+                </a:solidFill>
+              </a:rPr>
+              <a:t>개인정보 및</a:t>
             </a:r>
             <a:endParaRPr lang="en-US" sz="2200" dirty="0"/>
           </a:p>
@@ -3825,10 +2828,10 @@
             <a:r>
               <a:rPr lang="en-US" sz="2200" b="1" dirty="0">
                 <a:solidFill>
-                  <a:schemeClr val="tx2"/>
-                </a:solidFill>
-              </a:rPr>
-              <a:t>영양기준 검증</a:t>
+                  <a:schemeClr val="bg1"/>
+                </a:solidFill>
+              </a:rPr>
+              <a:t>내부 기밀 제외</a:t>
             </a:r>
             <a:endParaRPr lang="en-US" sz="2200" dirty="0"/>
           </a:p>
@@ -3836,14 +2839,14 @@
       </p:sp>
       <p:sp>
         <p:nvSpPr>
-          <p:cNvPr id="15" name="caution body 2"/>
+          <p:cNvPr id="7" name="caution body 1"/>
           <p:cNvSpPr txBox="1"/>
           <p:nvPr/>
         </p:nvSpPr>
         <p:spPr>
           <a:xfrm>
-            <a:off x="4709160" y="4343400"/>
-            <a:ext cx="2697480" cy="1188720"/>
+            <a:off x="1280160" y="4251960"/>
+            <a:ext cx="2514600" cy="1188720"/>
           </a:xfrm>
           <a:prstGeom prst="rect">
             <a:avLst/>
@@ -3857,17 +2860,17 @@
           <a:p>
             <a:pPr eaLnBrk="0" indent="0" marL="0">
               <a:lnSpc>
-                <a:spcPct val="120000"/>
+                <a:spcPct val="130000"/>
               </a:lnSpc>
               <a:buNone/>
             </a:pPr>
             <a:r>
               <a:rPr lang="en-US" sz="1600" dirty="0">
                 <a:solidFill>
-                  <a:schemeClr val="tx1"/>
-                </a:solidFill>
-              </a:rPr>
-              <a:t>식단 영양량, 관련 법령(학교급식법 등), 조리·위생 지침은 영양교사가 직접 재확인</a:t>
+                  <a:schemeClr val="accent3"/>
+                </a:solidFill>
+              </a:rPr>
+              <a:t>학생 이름, 교직원 실명, 특정 업체명, 내부 결재 라인 등은 반드시 익명 처리</a:t>
             </a:r>
             <a:endParaRPr lang="en-US" sz="1600" dirty="0"/>
           </a:p>
@@ -3875,87 +2878,77 @@
       </p:sp>
       <p:sp>
         <p:nvSpPr>
-          <p:cNvPr id="16" name="caution card 3"/>
+          <p:cNvPr id="8" name="caution example 1"/>
+          <p:cNvSpPr txBox="1"/>
+          <p:nvPr/>
+        </p:nvSpPr>
+        <p:spPr>
+          <a:xfrm>
+            <a:off x="1280160" y="5440680"/>
+            <a:ext cx="2514600" cy="365760"/>
+          </a:xfrm>
+          <a:prstGeom prst="rect">
+            <a:avLst/>
+          </a:prstGeom>
+          <a:noFill/>
+          <a:ln/>
+        </p:spPr>
+        <p:txBody>
+          <a:bodyPr wrap="square" lIns="0" tIns="0" rIns="0" bIns="0" rtlCol="0" anchor="ctr"/>
+          <a:lstStyle/>
+          <a:p>
+            <a:pPr eaLnBrk="0" indent="0" marL="0">
+              <a:buNone/>
+            </a:pPr>
+            <a:r>
+              <a:rPr lang="en-US" sz="1500" b="1" dirty="0">
+                <a:solidFill>
+                  <a:schemeClr val="accent1"/>
+                </a:solidFill>
+              </a:rPr>
+              <a:t>예) A학생, 00업체</a:t>
+            </a:r>
+            <a:endParaRPr lang="en-US" sz="1500" dirty="0"/>
+          </a:p>
+        </p:txBody>
+      </p:sp>
+      <p:sp>
+        <p:nvSpPr>
+          <p:cNvPr id="9" name="caution card 2"/>
           <p:cNvSpPr/>
           <p:nvPr/>
         </p:nvSpPr>
         <p:spPr>
           <a:xfrm>
-            <a:off x="8046720" y="1737360"/>
-            <a:ext cx="3429000" cy="4343400"/>
+            <a:off x="4457700" y="2148840"/>
+            <a:ext cx="3246120" cy="3840480"/>
           </a:xfrm>
           <a:prstGeom prst="roundRect">
             <a:avLst>
-              <a:gd name="adj" fmla="val 8000"/>
+              <a:gd name="adj" fmla="val 5070"/>
             </a:avLst>
-          </a:prstGeom>
-          <a:solidFill>
-            <a:schemeClr val="bg1"/>
-          </a:solidFill>
-          <a:ln/>
-          <a:effectLst>
-            <a:outerShdw sx="100000" sy="100000" kx="0" ky="0" algn="bl" rotWithShape="0" blurRad="127000" dist="38100" dir="5400000">
-              <a:srgbClr val="17382B">
-                <a:alpha val="10000"/>
-              </a:srgbClr>
-            </a:outerShdw>
-          </a:effectLst>
-        </p:spPr>
-      </p:sp>
-      <p:sp>
-        <p:nvSpPr>
-          <p:cNvPr id="17" name="caution icon circle 3"/>
-          <p:cNvSpPr/>
-          <p:nvPr/>
-        </p:nvSpPr>
-        <p:spPr>
-          <a:xfrm>
-            <a:off x="8412480" y="2148840"/>
-            <a:ext cx="868680" cy="868680"/>
-          </a:xfrm>
-          <a:prstGeom prst="ellipse">
-            <a:avLst/>
           </a:prstGeom>
           <a:solidFill>
             <a:schemeClr val="tx2"/>
           </a:solidFill>
-          <a:ln/>
-        </p:spPr>
-      </p:sp>
-      <p:pic>
-        <p:nvPicPr>
-          <p:cNvPr id="18" name="caution icon 3" descr="preencoded.png">    </p:cNvPr>
-          <p:cNvPicPr>
-            <a:picLocks noChangeAspect="1"/>
-          </p:cNvPicPr>
-          <p:nvPr/>
-        </p:nvPicPr>
-        <p:blipFill>
-          <a:blip r:embed="rId3"/>
-          <a:stretch>
-            <a:fillRect/>
-          </a:stretch>
-        </p:blipFill>
-        <p:spPr>
-          <a:xfrm>
-            <a:off x="8641080" y="2377440"/>
-            <a:ext cx="411480" cy="411480"/>
-          </a:xfrm>
-          <a:prstGeom prst="rect">
-            <a:avLst/>
-          </a:prstGeom>
-        </p:spPr>
-      </p:pic>
-      <p:sp>
-        <p:nvSpPr>
-          <p:cNvPr id="19" name="caution number 3"/>
+          <a:ln w="12700">
+            <a:solidFill>
+              <a:schemeClr val="accent5"/>
+            </a:solidFill>
+            <a:prstDash val="solid"/>
+          </a:ln>
+        </p:spPr>
+      </p:sp>
+      <p:sp>
+        <p:nvSpPr>
+          <p:cNvPr id="10" name="caution number 2"/>
           <p:cNvSpPr txBox="1"/>
           <p:nvPr/>
         </p:nvSpPr>
         <p:spPr>
           <a:xfrm>
-            <a:off x="10287000" y="2148840"/>
-            <a:ext cx="822960" cy="548640"/>
+            <a:off x="4823460" y="2468880"/>
+            <a:ext cx="1097280" cy="548640"/>
           </a:xfrm>
           <a:prstGeom prst="rect">
             <a:avLst/>
@@ -3967,31 +2960,31 @@
           <a:bodyPr wrap="square" lIns="0" tIns="0" rIns="0" bIns="0" rtlCol="0" anchor="ctr"/>
           <a:lstStyle/>
           <a:p>
-            <a:pPr eaLnBrk="0" algn="r" indent="0" marL="0">
-              <a:buNone/>
-            </a:pPr>
-            <a:r>
-              <a:rPr lang="en-US" sz="2400" b="1" dirty="0">
-                <a:solidFill>
-                  <a:schemeClr val="accent5"/>
-                </a:solidFill>
-              </a:rPr>
-              <a:t>03</a:t>
-            </a:r>
-            <a:endParaRPr lang="en-US" sz="2400" dirty="0"/>
-          </a:p>
-        </p:txBody>
-      </p:sp>
-      <p:sp>
-        <p:nvSpPr>
-          <p:cNvPr id="20" name="caution title 3"/>
+            <a:pPr eaLnBrk="0" indent="0" marL="0">
+              <a:buNone/>
+            </a:pPr>
+            <a:r>
+              <a:rPr lang="en-US" sz="2800" b="1" dirty="0">
+                <a:solidFill>
+                  <a:schemeClr val="accent1"/>
+                </a:solidFill>
+              </a:rPr>
+              <a:t>02</a:t>
+            </a:r>
+            <a:endParaRPr lang="en-US" sz="2800" dirty="0"/>
+          </a:p>
+        </p:txBody>
+      </p:sp>
+      <p:sp>
+        <p:nvSpPr>
+          <p:cNvPr id="11" name="caution title 2"/>
           <p:cNvSpPr txBox="1"/>
           <p:nvPr/>
         </p:nvSpPr>
         <p:spPr>
           <a:xfrm>
-            <a:off x="8412480" y="3246120"/>
-            <a:ext cx="2697480" cy="1005840"/>
+            <a:off x="4823460" y="3154680"/>
+            <a:ext cx="2514600" cy="960120"/>
           </a:xfrm>
           <a:prstGeom prst="rect">
             <a:avLst/>
@@ -4009,10 +3002,10 @@
             <a:r>
               <a:rPr lang="en-US" sz="2200" b="1" dirty="0">
                 <a:solidFill>
-                  <a:schemeClr val="tx2"/>
-                </a:solidFill>
-              </a:rPr>
-              <a:t>초안 활용 및</a:t>
+                  <a:schemeClr val="bg1"/>
+                </a:solidFill>
+              </a:rPr>
+              <a:t>사실관계 및</a:t>
             </a:r>
             <a:endParaRPr lang="en-US" sz="2200" dirty="0"/>
           </a:p>
@@ -4023,10 +3016,10 @@
             <a:r>
               <a:rPr lang="en-US" sz="2200" b="1" dirty="0">
                 <a:solidFill>
-                  <a:schemeClr val="tx2"/>
-                </a:solidFill>
-              </a:rPr>
-              <a:t>수정</a:t>
+                  <a:schemeClr val="bg1"/>
+                </a:solidFill>
+              </a:rPr>
+              <a:t>영양기준 검증</a:t>
             </a:r>
             <a:endParaRPr lang="en-US" sz="2200" dirty="0"/>
           </a:p>
@@ -4034,14 +3027,14 @@
       </p:sp>
       <p:sp>
         <p:nvSpPr>
-          <p:cNvPr id="21" name="caution body 3"/>
+          <p:cNvPr id="12" name="caution body 2"/>
           <p:cNvSpPr txBox="1"/>
           <p:nvPr/>
         </p:nvSpPr>
         <p:spPr>
           <a:xfrm>
-            <a:off x="8412480" y="4343400"/>
-            <a:ext cx="2697480" cy="1188720"/>
+            <a:off x="4823460" y="4251960"/>
+            <a:ext cx="2514600" cy="1188720"/>
           </a:xfrm>
           <a:prstGeom prst="rect">
             <a:avLst/>
@@ -4055,14 +3048,166 @@
           <a:p>
             <a:pPr eaLnBrk="0" indent="0" marL="0">
               <a:lnSpc>
-                <a:spcPct val="120000"/>
+                <a:spcPct val="130000"/>
               </a:lnSpc>
               <a:buNone/>
             </a:pPr>
             <a:r>
               <a:rPr lang="en-US" sz="1600" dirty="0">
                 <a:solidFill>
-                  <a:schemeClr val="tx1"/>
+                  <a:schemeClr val="accent3"/>
+                </a:solidFill>
+              </a:rPr>
+              <a:t>식단 영양량, 관련 법령(학교급식법 등), 조리·위생 지침은 영양교사가 직접 재확인</a:t>
+            </a:r>
+            <a:endParaRPr lang="en-US" sz="1600" dirty="0"/>
+          </a:p>
+        </p:txBody>
+      </p:sp>
+      <p:sp>
+        <p:nvSpPr>
+          <p:cNvPr id="13" name="caution card 3"/>
+          <p:cNvSpPr/>
+          <p:nvPr/>
+        </p:nvSpPr>
+        <p:spPr>
+          <a:xfrm>
+            <a:off x="8001000" y="2148840"/>
+            <a:ext cx="3246120" cy="3840480"/>
+          </a:xfrm>
+          <a:prstGeom prst="roundRect">
+            <a:avLst>
+              <a:gd name="adj" fmla="val 5070"/>
+            </a:avLst>
+          </a:prstGeom>
+          <a:solidFill>
+            <a:schemeClr val="tx2"/>
+          </a:solidFill>
+          <a:ln w="12700">
+            <a:solidFill>
+              <a:schemeClr val="accent5"/>
+            </a:solidFill>
+            <a:prstDash val="solid"/>
+          </a:ln>
+        </p:spPr>
+      </p:sp>
+      <p:sp>
+        <p:nvSpPr>
+          <p:cNvPr id="14" name="caution number 3"/>
+          <p:cNvSpPr txBox="1"/>
+          <p:nvPr/>
+        </p:nvSpPr>
+        <p:spPr>
+          <a:xfrm>
+            <a:off x="8366760" y="2468880"/>
+            <a:ext cx="1097280" cy="548640"/>
+          </a:xfrm>
+          <a:prstGeom prst="rect">
+            <a:avLst/>
+          </a:prstGeom>
+          <a:noFill/>
+          <a:ln/>
+        </p:spPr>
+        <p:txBody>
+          <a:bodyPr wrap="square" lIns="0" tIns="0" rIns="0" bIns="0" rtlCol="0" anchor="ctr"/>
+          <a:lstStyle/>
+          <a:p>
+            <a:pPr eaLnBrk="0" indent="0" marL="0">
+              <a:buNone/>
+            </a:pPr>
+            <a:r>
+              <a:rPr lang="en-US" sz="2800" b="1" dirty="0">
+                <a:solidFill>
+                  <a:schemeClr val="accent1"/>
+                </a:solidFill>
+              </a:rPr>
+              <a:t>03</a:t>
+            </a:r>
+            <a:endParaRPr lang="en-US" sz="2800" dirty="0"/>
+          </a:p>
+        </p:txBody>
+      </p:sp>
+      <p:sp>
+        <p:nvSpPr>
+          <p:cNvPr id="15" name="caution title 3"/>
+          <p:cNvSpPr txBox="1"/>
+          <p:nvPr/>
+        </p:nvSpPr>
+        <p:spPr>
+          <a:xfrm>
+            <a:off x="8366760" y="3154680"/>
+            <a:ext cx="2514600" cy="960120"/>
+          </a:xfrm>
+          <a:prstGeom prst="rect">
+            <a:avLst/>
+          </a:prstGeom>
+          <a:noFill/>
+          <a:ln/>
+        </p:spPr>
+        <p:txBody>
+          <a:bodyPr wrap="square" lIns="0" tIns="0" rIns="0" bIns="0" rtlCol="0" anchor="t"/>
+          <a:lstStyle/>
+          <a:p>
+            <a:pPr eaLnBrk="0" indent="0" marL="0">
+              <a:buNone/>
+            </a:pPr>
+            <a:r>
+              <a:rPr lang="en-US" sz="2200" b="1" dirty="0">
+                <a:solidFill>
+                  <a:schemeClr val="bg1"/>
+                </a:solidFill>
+              </a:rPr>
+              <a:t>초안 활용 및</a:t>
+            </a:r>
+            <a:endParaRPr lang="en-US" sz="2200" dirty="0"/>
+          </a:p>
+          <a:p>
+            <a:pPr eaLnBrk="0" indent="0" marL="0">
+              <a:buNone/>
+            </a:pPr>
+            <a:r>
+              <a:rPr lang="en-US" sz="2200" b="1" dirty="0">
+                <a:solidFill>
+                  <a:schemeClr val="bg1"/>
+                </a:solidFill>
+              </a:rPr>
+              <a:t>수정</a:t>
+            </a:r>
+            <a:endParaRPr lang="en-US" sz="2200" dirty="0"/>
+          </a:p>
+        </p:txBody>
+      </p:sp>
+      <p:sp>
+        <p:nvSpPr>
+          <p:cNvPr id="16" name="caution body 3"/>
+          <p:cNvSpPr txBox="1"/>
+          <p:nvPr/>
+        </p:nvSpPr>
+        <p:spPr>
+          <a:xfrm>
+            <a:off x="8366760" y="4251960"/>
+            <a:ext cx="2514600" cy="1188720"/>
+          </a:xfrm>
+          <a:prstGeom prst="rect">
+            <a:avLst/>
+          </a:prstGeom>
+          <a:noFill/>
+          <a:ln/>
+        </p:spPr>
+        <p:txBody>
+          <a:bodyPr wrap="square" lIns="0" tIns="0" rIns="0" bIns="0" rtlCol="0" anchor="t"/>
+          <a:lstStyle/>
+          <a:p>
+            <a:pPr eaLnBrk="0" indent="0" marL="0">
+              <a:lnSpc>
+                <a:spcPct val="130000"/>
+              </a:lnSpc>
+              <a:buNone/>
+            </a:pPr>
+            <a:r>
+              <a:rPr lang="en-US" sz="1600" dirty="0">
+                <a:solidFill>
+                  <a:schemeClr val="accent3"/>
                 </a:solidFill>
               </a:rPr>
               <a:t>AI는 뼈대(초안)를 잡는 보조 도구, 학교 현장에 맞게 다듬어 공문서로 완성</a:t>
@@ -4083,8 +3228,8 @@
         </p:nvSpPr>
         <p:spPr>
           <a:xfrm>
-            <a:off x="11247120" y="6355080"/>
-            <a:ext cx="457200" cy="274320"/>
+            <a:off x="11155680" y="6355080"/>
+            <a:ext cx="548640" cy="274320"/>
           </a:xfrm>
           <a:prstGeom prst="rect">
             <a:avLst/>
@@ -4101,7 +3246,7 @@
             <a:lvl1pPr>
               <a:defRPr sz="1000">
                 <a:solidFill>
-                  <a:schemeClr val="accent6"/>
+                  <a:schemeClr val="accent4"/>
                 </a:solidFill>
               </a:defRPr>
             </a:lvl1pPr>
@@ -4143,14 +3288,14 @@
       </p:grpSpPr>
       <p:sp>
         <p:nvSpPr>
-          <p:cNvPr id="2" name="closing line 1"/>
+          <p:cNvPr id="2" name="kicker"/>
           <p:cNvSpPr txBox="1"/>
           <p:nvPr/>
         </p:nvSpPr>
         <p:spPr>
           <a:xfrm>
-            <a:off x="731520" y="2103120"/>
-            <a:ext cx="10698480" cy="914400"/>
+            <a:off x="914400" y="685800"/>
+            <a:ext cx="10058400" cy="365760"/>
           </a:xfrm>
           <a:prstGeom prst="rect">
             <a:avLst/>
@@ -4166,27 +3311,27 @@
               <a:buNone/>
             </a:pPr>
             <a:r>
-              <a:rPr lang="en-US" sz="4400" b="1" dirty="0">
-                <a:solidFill>
-                  <a:schemeClr val="bg1"/>
-                </a:solidFill>
-              </a:rPr>
-              <a:t>AI는 초안까지,</a:t>
-            </a:r>
-            <a:endParaRPr lang="en-US" sz="4400" dirty="0"/>
-          </a:p>
-        </p:txBody>
-      </p:sp>
-      <p:sp>
-        <p:nvSpPr>
-          <p:cNvPr id="3" name="closing line 2"/>
+              <a:rPr lang="en-US" sz="1500" b="1" spc="400" kern="0" dirty="0">
+                <a:solidFill>
+                  <a:schemeClr val="accent1"/>
+                </a:solidFill>
+              </a:rPr>
+              <a:t>WRAP-UP</a:t>
+            </a:r>
+            <a:endParaRPr lang="en-US" sz="1500" dirty="0"/>
+          </a:p>
+        </p:txBody>
+      </p:sp>
+      <p:sp>
+        <p:nvSpPr>
+          <p:cNvPr id="3" name="closing line 1"/>
           <p:cNvSpPr txBox="1"/>
           <p:nvPr/>
         </p:nvSpPr>
         <p:spPr>
           <a:xfrm>
-            <a:off x="731520" y="3017520"/>
-            <a:ext cx="10698480" cy="914400"/>
+            <a:off x="914400" y="2606040"/>
+            <a:ext cx="10332720" cy="1005840"/>
           </a:xfrm>
           <a:prstGeom prst="rect">
             <a:avLst/>
@@ -4202,14 +3347,50 @@
               <a:buNone/>
             </a:pPr>
             <a:r>
-              <a:rPr lang="en-US" sz="4400" b="1" dirty="0">
-                <a:solidFill>
-                  <a:schemeClr val="accent2"/>
+              <a:rPr lang="en-US" sz="5000" b="1" dirty="0">
+                <a:solidFill>
+                  <a:schemeClr val="bg1"/>
+                </a:solidFill>
+              </a:rPr>
+              <a:t>AI는 초안까지,</a:t>
+            </a:r>
+            <a:endParaRPr lang="en-US" sz="5000" dirty="0"/>
+          </a:p>
+        </p:txBody>
+      </p:sp>
+      <p:sp>
+        <p:nvSpPr>
+          <p:cNvPr id="4" name="closing line 2"/>
+          <p:cNvSpPr txBox="1"/>
+          <p:nvPr/>
+        </p:nvSpPr>
+        <p:spPr>
+          <a:xfrm>
+            <a:off x="914400" y="3611880"/>
+            <a:ext cx="10332720" cy="1005840"/>
+          </a:xfrm>
+          <a:prstGeom prst="rect">
+            <a:avLst/>
+          </a:prstGeom>
+          <a:noFill/>
+          <a:ln/>
+        </p:spPr>
+        <p:txBody>
+          <a:bodyPr wrap="square" lIns="0" tIns="0" rIns="0" bIns="0" rtlCol="0" anchor="ctr"/>
+          <a:lstStyle/>
+          <a:p>
+            <a:pPr eaLnBrk="0" indent="0" marL="0">
+              <a:buNone/>
+            </a:pPr>
+            <a:r>
+              <a:rPr lang="en-US" sz="5000" b="1" dirty="0">
+                <a:solidFill>
+                  <a:schemeClr val="accent3"/>
                 </a:solidFill>
               </a:rPr>
               <a:t>완성은 영양교사의 손에서</a:t>
             </a:r>
-            <a:endParaRPr lang="en-US" sz="4400" dirty="0"/>
+            <a:endParaRPr lang="en-US" sz="5000" dirty="0"/>
           </a:p>
         </p:txBody>
       </p:sp>
@@ -4222,47 +3403,47 @@
 </file>
 
 <file path=ppt/theme/theme1.xml><?xml version="1.0" encoding="utf-8"?>
-<a:theme xmlns:a="http://schemas.openxmlformats.org/drawingml/2006/main" name="Nutrition Teacher AI">
+<a:theme xmlns:a="http://schemas.openxmlformats.org/drawingml/2006/main" name="Navy Insight">
   <a:themeElements>
-    <a:clrScheme name="Nutrition Teacher AI">
+    <a:clrScheme name="Navy Insight">
       <a:dk1>
-        <a:srgbClr val="1B2420"/>
+        <a:srgbClr val="0C1322"/>
       </a:dk1>
       <a:lt1>
         <a:srgbClr val="FFFFFF"/>
       </a:lt1>
       <a:dk2>
-        <a:srgbClr val="17382B"/>
+        <a:srgbClr val="172036"/>
       </a:dk2>
       <a:lt2>
-        <a:srgbClr val="F2F5F3"/>
+        <a:srgbClr val="E2E8F0"/>
       </a:lt2>
       <a:accent1>
-        <a:srgbClr val="17382B"/>
+        <a:srgbClr val="2DD4BF"/>
       </a:accent1>
       <a:accent2>
-        <a:srgbClr val="F26B1D"/>
+        <a:srgbClr val="3B82F6"/>
       </a:accent2>
       <a:accent3>
-        <a:srgbClr val="2F6B4F"/>
+        <a:srgbClr val="94A3B8"/>
       </a:accent3>
       <a:accent4>
-        <a:srgbClr val="FFE6D5"/>
+        <a:srgbClr val="64748B"/>
       </a:accent4>
       <a:accent5>
-        <a:srgbClr val="C9D8CF"/>
+        <a:srgbClr val="26314A"/>
       </a:accent5>
       <a:accent6>
-        <a:srgbClr val="6E7A74"/>
+        <a:srgbClr val="0F172A"/>
       </a:accent6>
       <a:hlink>
-        <a:srgbClr val="2F6B4F"/>
+        <a:srgbClr val="2DD4BF"/>
       </a:hlink>
       <a:folHlink>
-        <a:srgbClr val="2F6B4F"/>
+        <a:srgbClr val="2DD4BF"/>
       </a:folHlink>
     </a:clrScheme>
-    <a:fontScheme name="Nutrition Teacher AI">
+    <a:fontScheme name="Navy Insight">
       <a:majorFont>
         <a:latin typeface="Malgun Gothic"/>
         <a:ea typeface=""/>
